--- a/presentations/Variation_And_Equation_FineTuning/Variation_And_Equation_FineTuning.pptx
+++ b/presentations/Variation_And_Equation_FineTuning/Variation_And_Equation_FineTuning.pptx
@@ -10,6 +10,9 @@
     <p:sldId id="258" r:id="rId9"/>
     <p:sldId id="259" r:id="rId10"/>
     <p:sldId id="260" r:id="rId11"/>
+    <p:sldId id="261" r:id="rId12"/>
+    <p:sldId id="262" r:id="rId13"/>
+    <p:sldId id="263" r:id="rId14"/>
   </p:sldIdLst>
   <p:sldSz cx="12191695" cy="6858000" type="screen4x3"/>
   <p:notesSz cx="6858000" cy="9144000"/>
@@ -3860,7 +3863,7 @@
                 </a:solidFill>
                 <a:latin typeface="Calibri"/>
               </a:rPr>
-              <a:t>Part 1 Result: Modest, Independently-Confirmed Signal</a:t>
+              <a:t>Part 1 Result: Predicted vs. True Variation, 5 Example Pixels</a:t>
             </a:r>
           </a:p>
         </p:txBody>
@@ -3944,6 +3947,383 @@
                 <a:latin typeface="Calibri"/>
               </a:rPr>
               <a:t>3</a:t>
+            </a:r>
+          </a:p>
+        </p:txBody>
+      </p:sp>
+      <p:pic>
+        <p:nvPicPr>
+          <p:cNvPr id="6" name="Picture 5" descr="anomaly_example_curves.png"/>
+          <p:cNvPicPr>
+            <a:picLocks noChangeAspect="1"/>
+          </p:cNvPicPr>
+          <p:nvPr/>
+        </p:nvPicPr>
+        <p:blipFill>
+          <a:blip r:embed="rId2"/>
+          <a:stretch>
+            <a:fillRect/>
+          </a:stretch>
+        </p:blipFill>
+        <p:spPr>
+          <a:xfrm>
+            <a:off x="502920" y="2535413"/>
+            <a:ext cx="11185855" cy="2079782"/>
+          </a:xfrm>
+          <a:prstGeom prst="rect">
+            <a:avLst/>
+          </a:prstGeom>
+        </p:spPr>
+      </p:pic>
+      <p:sp>
+        <p:nvSpPr>
+          <p:cNvPr id="7" name="Rectangle 6"/>
+          <p:cNvSpPr/>
+          <p:nvPr/>
+        </p:nvSpPr>
+        <p:spPr>
+          <a:xfrm>
+            <a:off x="0" y="6144768"/>
+            <a:ext cx="12191695" cy="713232"/>
+          </a:xfrm>
+          <a:prstGeom prst="rect">
+            <a:avLst/>
+          </a:prstGeom>
+          <a:solidFill>
+            <a:srgbClr val="E7F0E6"/>
+          </a:solidFill>
+          <a:ln>
+            <a:noFill/>
+          </a:ln>
+          <a:effectLst/>
+        </p:spPr>
+        <p:style>
+          <a:lnRef idx="1">
+            <a:schemeClr val="accent1"/>
+          </a:lnRef>
+          <a:fillRef idx="3">
+            <a:schemeClr val="accent1"/>
+          </a:fillRef>
+          <a:effectRef idx="2">
+            <a:schemeClr val="accent1"/>
+          </a:effectRef>
+          <a:fontRef idx="minor">
+            <a:schemeClr val="lt1"/>
+          </a:fontRef>
+        </p:style>
+        <p:txBody>
+          <a:bodyPr rtlCol="0" anchor="ctr"/>
+          <a:lstStyle/>
+          <a:p>
+            <a:pPr algn="ctr"/>
+          </a:p>
+        </p:txBody>
+      </p:sp>
+      <p:sp>
+        <p:nvSpPr>
+          <p:cNvPr id="8" name="Rectangle 7"/>
+          <p:cNvSpPr/>
+          <p:nvPr/>
+        </p:nvSpPr>
+        <p:spPr>
+          <a:xfrm>
+            <a:off x="0" y="6144768"/>
+            <a:ext cx="109728" cy="713232"/>
+          </a:xfrm>
+          <a:prstGeom prst="rect">
+            <a:avLst/>
+          </a:prstGeom>
+          <a:solidFill>
+            <a:srgbClr val="2F6F5E"/>
+          </a:solidFill>
+          <a:ln>
+            <a:noFill/>
+          </a:ln>
+          <a:effectLst/>
+        </p:spPr>
+        <p:style>
+          <a:lnRef idx="1">
+            <a:schemeClr val="accent1"/>
+          </a:lnRef>
+          <a:fillRef idx="3">
+            <a:schemeClr val="accent1"/>
+          </a:fillRef>
+          <a:effectRef idx="2">
+            <a:schemeClr val="accent1"/>
+          </a:effectRef>
+          <a:fontRef idx="minor">
+            <a:schemeClr val="lt1"/>
+          </a:fontRef>
+        </p:style>
+        <p:txBody>
+          <a:bodyPr rtlCol="0" anchor="ctr"/>
+          <a:lstStyle/>
+          <a:p>
+            <a:pPr algn="ctr"/>
+          </a:p>
+        </p:txBody>
+      </p:sp>
+      <p:sp>
+        <p:nvSpPr>
+          <p:cNvPr id="9" name="TextBox 8"/>
+          <p:cNvSpPr txBox="1"/>
+          <p:nvPr/>
+        </p:nvSpPr>
+        <p:spPr>
+          <a:xfrm>
+            <a:off x="411480" y="6144768"/>
+            <a:ext cx="11368735" cy="713232"/>
+          </a:xfrm>
+          <a:prstGeom prst="rect">
+            <a:avLst/>
+          </a:prstGeom>
+          <a:noFill/>
+        </p:spPr>
+        <p:txBody>
+          <a:bodyPr wrap="square" anchor="ctr" lIns="0" rIns="0" tIns="0" bIns="0">
+            <a:spAutoFit/>
+          </a:bodyPr>
+          <a:lstStyle/>
+          <a:p>
+            <a:pPr algn="l">
+              <a:lnSpc>
+                <a:spcPct val="100000"/>
+              </a:lnSpc>
+            </a:pPr>
+            <a:r>
+              <a:rPr sz="1200" b="1" i="0">
+                <a:solidFill>
+                  <a:srgbClr val="1E4A33"/>
+                </a:solidFill>
+                <a:latin typeface="Calibri"/>
+              </a:rPr>
+              <a:t>TAKEAWAY   </a:t>
+            </a:r>
+          </a:p>
+        </p:txBody>
+      </p:sp>
+      <p:sp>
+        <p:nvSpPr>
+          <p:cNvPr id="10" name="TextBox 9"/>
+          <p:cNvSpPr txBox="1"/>
+          <p:nvPr/>
+        </p:nvSpPr>
+        <p:spPr>
+          <a:xfrm>
+            <a:off x="1417320" y="6144768"/>
+            <a:ext cx="10362895" cy="713232"/>
+          </a:xfrm>
+          <a:prstGeom prst="rect">
+            <a:avLst/>
+          </a:prstGeom>
+          <a:noFill/>
+        </p:spPr>
+        <p:txBody>
+          <a:bodyPr wrap="square" anchor="ctr" lIns="0" rIns="0" tIns="0" bIns="0">
+            <a:spAutoFit/>
+          </a:bodyPr>
+          <a:lstStyle/>
+          <a:p>
+            <a:pPr algn="l">
+              <a:lnSpc>
+                <a:spcPct val="100000"/>
+              </a:lnSpc>
+            </a:pPr>
+            <a:r>
+              <a:rPr sz="1450" b="1" i="0">
+                <a:solidFill>
+                  <a:srgbClr val="1E4A33"/>
+                </a:solidFill>
+                <a:latin typeface="Calibri"/>
+              </a:rPr>
+              <a:t>Deliberately not cherry-picked: spans the full range from the pool's best fit (Pearson r=0.94) down to its worst (r=−0.72) - most pixels track the true dip/recovery shape; some don't.</a:t>
+            </a:r>
+          </a:p>
+        </p:txBody>
+      </p:sp>
+    </p:spTree>
+  </p:cSld>
+  <p:clrMapOvr>
+    <a:masterClrMapping/>
+  </p:clrMapOvr>
+</p:sld>
+</file>
+
+<file path=ppt/slides/slide4.xml><?xml version="1.0" encoding="utf-8"?>
+<p:sld xmlns:a="http://schemas.openxmlformats.org/drawingml/2006/main" xmlns:p="http://schemas.openxmlformats.org/presentationml/2006/main" xmlns:r="http://schemas.openxmlformats.org/officeDocument/2006/relationships">
+  <p:cSld>
+    <p:bg>
+      <p:bgPr>
+        <a:solidFill>
+          <a:srgbClr val="FFFFFF"/>
+        </a:solidFill>
+        <a:effectLst/>
+      </p:bgPr>
+    </p:bg>
+    <p:spTree>
+      <p:nvGrpSpPr>
+        <p:cNvPr id="1" name=""/>
+        <p:cNvGrpSpPr/>
+        <p:nvPr/>
+      </p:nvGrpSpPr>
+      <p:grpSpPr/>
+      <p:sp>
+        <p:nvSpPr>
+          <p:cNvPr id="2" name="TextBox 1"/>
+          <p:cNvSpPr txBox="1"/>
+          <p:nvPr/>
+        </p:nvSpPr>
+        <p:spPr>
+          <a:xfrm>
+            <a:off x="502920" y="384048"/>
+            <a:ext cx="10972800" cy="292608"/>
+          </a:xfrm>
+          <a:prstGeom prst="rect">
+            <a:avLst/>
+          </a:prstGeom>
+          <a:noFill/>
+        </p:spPr>
+        <p:txBody>
+          <a:bodyPr wrap="square" anchor="t" lIns="0" rIns="0" tIns="0" bIns="0">
+            <a:spAutoFit/>
+          </a:bodyPr>
+          <a:lstStyle/>
+          <a:p>
+            <a:pPr algn="l">
+              <a:lnSpc>
+                <a:spcPct val="100000"/>
+              </a:lnSpc>
+            </a:pPr>
+            <a:r>
+              <a:rPr sz="1300" b="1" i="0">
+                <a:solidFill>
+                  <a:srgbClr val="2F6F5E"/>
+                </a:solidFill>
+                <a:latin typeface="Calibri"/>
+              </a:rPr>
+              <a:t>PART 1 — VARIATION-BASED FORECASTING</a:t>
+            </a:r>
+          </a:p>
+        </p:txBody>
+      </p:sp>
+      <p:sp>
+        <p:nvSpPr>
+          <p:cNvPr id="3" name="TextBox 2"/>
+          <p:cNvSpPr txBox="1"/>
+          <p:nvPr/>
+        </p:nvSpPr>
+        <p:spPr>
+          <a:xfrm>
+            <a:off x="502920" y="658368"/>
+            <a:ext cx="11155680" cy="566928"/>
+          </a:xfrm>
+          <a:prstGeom prst="rect">
+            <a:avLst/>
+          </a:prstGeom>
+          <a:noFill/>
+        </p:spPr>
+        <p:txBody>
+          <a:bodyPr wrap="square" anchor="t" lIns="0" rIns="0" tIns="0" bIns="0">
+            <a:spAutoFit/>
+          </a:bodyPr>
+          <a:lstStyle/>
+          <a:p>
+            <a:pPr algn="l">
+              <a:lnSpc>
+                <a:spcPct val="100000"/>
+              </a:lnSpc>
+            </a:pPr>
+            <a:r>
+              <a:rPr sz="2300" b="1" i="0">
+                <a:solidFill>
+                  <a:srgbClr val="1C2119"/>
+                </a:solidFill>
+                <a:latin typeface="Calibri"/>
+              </a:rPr>
+              <a:t>Part 1 Aggregate: Modest, Independently-Confirmed Signal</a:t>
+            </a:r>
+          </a:p>
+        </p:txBody>
+      </p:sp>
+      <p:sp>
+        <p:nvSpPr>
+          <p:cNvPr id="4" name="Rectangle 3"/>
+          <p:cNvSpPr/>
+          <p:nvPr/>
+        </p:nvSpPr>
+        <p:spPr>
+          <a:xfrm>
+            <a:off x="502920" y="1261872"/>
+            <a:ext cx="914400" cy="38100"/>
+          </a:xfrm>
+          <a:prstGeom prst="rect">
+            <a:avLst/>
+          </a:prstGeom>
+          <a:solidFill>
+            <a:srgbClr val="2F6F5E"/>
+          </a:solidFill>
+          <a:ln>
+            <a:noFill/>
+          </a:ln>
+          <a:effectLst/>
+        </p:spPr>
+        <p:style>
+          <a:lnRef idx="1">
+            <a:schemeClr val="accent1"/>
+          </a:lnRef>
+          <a:fillRef idx="3">
+            <a:schemeClr val="accent1"/>
+          </a:fillRef>
+          <a:effectRef idx="2">
+            <a:schemeClr val="accent1"/>
+          </a:effectRef>
+          <a:fontRef idx="minor">
+            <a:schemeClr val="lt1"/>
+          </a:fontRef>
+        </p:style>
+        <p:txBody>
+          <a:bodyPr rtlCol="0" anchor="ctr"/>
+          <a:lstStyle/>
+          <a:p>
+            <a:pPr algn="ctr"/>
+          </a:p>
+        </p:txBody>
+      </p:sp>
+      <p:sp>
+        <p:nvSpPr>
+          <p:cNvPr id="5" name="TextBox 4"/>
+          <p:cNvSpPr txBox="1"/>
+          <p:nvPr/>
+        </p:nvSpPr>
+        <p:spPr>
+          <a:xfrm>
+            <a:off x="11551615" y="384048"/>
+            <a:ext cx="365760" cy="274320"/>
+          </a:xfrm>
+          <a:prstGeom prst="rect">
+            <a:avLst/>
+          </a:prstGeom>
+          <a:noFill/>
+        </p:spPr>
+        <p:txBody>
+          <a:bodyPr wrap="square" anchor="t" lIns="0" rIns="0" tIns="0" bIns="0">
+            <a:spAutoFit/>
+          </a:bodyPr>
+          <a:lstStyle/>
+          <a:p>
+            <a:pPr algn="r">
+              <a:lnSpc>
+                <a:spcPct val="100000"/>
+              </a:lnSpc>
+            </a:pPr>
+            <a:r>
+              <a:rPr sz="1100" b="0" i="0">
+                <a:solidFill>
+                  <a:srgbClr val="8B9382"/>
+                </a:solidFill>
+                <a:latin typeface="Calibri"/>
+              </a:rPr>
+              <a:t>4</a:t>
             </a:r>
           </a:p>
         </p:txBody>
@@ -4386,501 +4766,6 @@
 </p:sld>
 </file>
 
-<file path=ppt/slides/slide4.xml><?xml version="1.0" encoding="utf-8"?>
-<p:sld xmlns:a="http://schemas.openxmlformats.org/drawingml/2006/main" xmlns:p="http://schemas.openxmlformats.org/presentationml/2006/main" xmlns:r="http://schemas.openxmlformats.org/officeDocument/2006/relationships">
-  <p:cSld>
-    <p:bg>
-      <p:bgPr>
-        <a:solidFill>
-          <a:srgbClr val="FFFFFF"/>
-        </a:solidFill>
-        <a:effectLst/>
-      </p:bgPr>
-    </p:bg>
-    <p:spTree>
-      <p:nvGrpSpPr>
-        <p:cNvPr id="1" name=""/>
-        <p:cNvGrpSpPr/>
-        <p:nvPr/>
-      </p:nvGrpSpPr>
-      <p:grpSpPr/>
-      <p:sp>
-        <p:nvSpPr>
-          <p:cNvPr id="2" name="TextBox 1"/>
-          <p:cNvSpPr txBox="1"/>
-          <p:nvPr/>
-        </p:nvSpPr>
-        <p:spPr>
-          <a:xfrm>
-            <a:off x="502920" y="384048"/>
-            <a:ext cx="10972800" cy="292608"/>
-          </a:xfrm>
-          <a:prstGeom prst="rect">
-            <a:avLst/>
-          </a:prstGeom>
-          <a:noFill/>
-        </p:spPr>
-        <p:txBody>
-          <a:bodyPr wrap="square" anchor="t" lIns="0" rIns="0" tIns="0" bIns="0">
-            <a:spAutoFit/>
-          </a:bodyPr>
-          <a:lstStyle/>
-          <a:p>
-            <a:pPr algn="l">
-              <a:lnSpc>
-                <a:spcPct val="100000"/>
-              </a:lnSpc>
-            </a:pPr>
-            <a:r>
-              <a:rPr sz="1300" b="1" i="0">
-                <a:solidFill>
-                  <a:srgbClr val="2A78D6"/>
-                </a:solidFill>
-                <a:latin typeface="Calibri"/>
-              </a:rPr>
-              <a:t>PART 2 — PHYSICS-GUIDED FINE-TUNING</a:t>
-            </a:r>
-          </a:p>
-        </p:txBody>
-      </p:sp>
-      <p:sp>
-        <p:nvSpPr>
-          <p:cNvPr id="3" name="TextBox 2"/>
-          <p:cNvSpPr txBox="1"/>
-          <p:nvPr/>
-        </p:nvSpPr>
-        <p:spPr>
-          <a:xfrm>
-            <a:off x="502920" y="658368"/>
-            <a:ext cx="11155680" cy="566928"/>
-          </a:xfrm>
-          <a:prstGeom prst="rect">
-            <a:avLst/>
-          </a:prstGeom>
-          <a:noFill/>
-        </p:spPr>
-        <p:txBody>
-          <a:bodyPr wrap="square" anchor="t" lIns="0" rIns="0" tIns="0" bIns="0">
-            <a:spAutoFit/>
-          </a:bodyPr>
-          <a:lstStyle/>
-          <a:p>
-            <a:pPr algn="l">
-              <a:lnSpc>
-                <a:spcPct val="100000"/>
-              </a:lnSpc>
-            </a:pPr>
-            <a:r>
-              <a:rPr sz="2300" b="1" i="0">
-                <a:solidFill>
-                  <a:srgbClr val="1C2119"/>
-                </a:solidFill>
-                <a:latin typeface="Calibri"/>
-              </a:rPr>
-              <a:t>Part 2: Fine-Tuning with the Exact Growth-Mortality Equation</a:t>
-            </a:r>
-          </a:p>
-        </p:txBody>
-      </p:sp>
-      <p:sp>
-        <p:nvSpPr>
-          <p:cNvPr id="4" name="Rectangle 3"/>
-          <p:cNvSpPr/>
-          <p:nvPr/>
-        </p:nvSpPr>
-        <p:spPr>
-          <a:xfrm>
-            <a:off x="502920" y="1261872"/>
-            <a:ext cx="914400" cy="38100"/>
-          </a:xfrm>
-          <a:prstGeom prst="rect">
-            <a:avLst/>
-          </a:prstGeom>
-          <a:solidFill>
-            <a:srgbClr val="2A78D6"/>
-          </a:solidFill>
-          <a:ln>
-            <a:noFill/>
-          </a:ln>
-          <a:effectLst/>
-        </p:spPr>
-        <p:style>
-          <a:lnRef idx="1">
-            <a:schemeClr val="accent1"/>
-          </a:lnRef>
-          <a:fillRef idx="3">
-            <a:schemeClr val="accent1"/>
-          </a:fillRef>
-          <a:effectRef idx="2">
-            <a:schemeClr val="accent1"/>
-          </a:effectRef>
-          <a:fontRef idx="minor">
-            <a:schemeClr val="lt1"/>
-          </a:fontRef>
-        </p:style>
-        <p:txBody>
-          <a:bodyPr rtlCol="0" anchor="ctr"/>
-          <a:lstStyle/>
-          <a:p>
-            <a:pPr algn="ctr"/>
-          </a:p>
-        </p:txBody>
-      </p:sp>
-      <p:sp>
-        <p:nvSpPr>
-          <p:cNvPr id="5" name="TextBox 4"/>
-          <p:cNvSpPr txBox="1"/>
-          <p:nvPr/>
-        </p:nvSpPr>
-        <p:spPr>
-          <a:xfrm>
-            <a:off x="11551615" y="384048"/>
-            <a:ext cx="365760" cy="274320"/>
-          </a:xfrm>
-          <a:prstGeom prst="rect">
-            <a:avLst/>
-          </a:prstGeom>
-          <a:noFill/>
-        </p:spPr>
-        <p:txBody>
-          <a:bodyPr wrap="square" anchor="t" lIns="0" rIns="0" tIns="0" bIns="0">
-            <a:spAutoFit/>
-          </a:bodyPr>
-          <a:lstStyle/>
-          <a:p>
-            <a:pPr algn="r">
-              <a:lnSpc>
-                <a:spcPct val="100000"/>
-              </a:lnSpc>
-            </a:pPr>
-            <a:r>
-              <a:rPr sz="1100" b="0" i="0">
-                <a:solidFill>
-                  <a:srgbClr val="8B9382"/>
-                </a:solidFill>
-                <a:latin typeface="Calibri"/>
-              </a:rPr>
-              <a:t>4</a:t>
-            </a:r>
-          </a:p>
-        </p:txBody>
-      </p:sp>
-      <p:sp>
-        <p:nvSpPr>
-          <p:cNvPr id="6" name="TextBox 5"/>
-          <p:cNvSpPr txBox="1"/>
-          <p:nvPr/>
-        </p:nvSpPr>
-        <p:spPr>
-          <a:xfrm>
-            <a:off x="502920" y="1143000"/>
-            <a:ext cx="10789920" cy="320040"/>
-          </a:xfrm>
-          <a:prstGeom prst="rect">
-            <a:avLst/>
-          </a:prstGeom>
-          <a:noFill/>
-        </p:spPr>
-        <p:txBody>
-          <a:bodyPr wrap="square" anchor="t" lIns="0" rIns="0" tIns="0" bIns="0">
-            <a:spAutoFit/>
-          </a:bodyPr>
-          <a:lstStyle/>
-          <a:p>
-            <a:pPr algn="l">
-              <a:lnSpc>
-                <a:spcPct val="100000"/>
-              </a:lnSpc>
-            </a:pPr>
-            <a:r>
-              <a:rPr sz="1450" b="0" i="0">
-                <a:solidFill>
-                  <a:srgbClr val="1C2119"/>
-                </a:solidFill>
-                <a:latin typeface="Calibri"/>
-              </a:rPr>
-              <a:t>Prof. Wang's diagnosis: the earlier ad hoc physics term library undersold the physics - this is the equation she actually meant:</a:t>
-            </a:r>
-          </a:p>
-        </p:txBody>
-      </p:sp>
-      <p:pic>
-        <p:nvPicPr>
-          <p:cNvPr id="7" name="Picture 6" descr="phenology_equation.png"/>
-          <p:cNvPicPr>
-            <a:picLocks noChangeAspect="1"/>
-          </p:cNvPicPr>
-          <p:nvPr/>
-        </p:nvPicPr>
-        <p:blipFill>
-          <a:blip r:embed="rId2"/>
-          <a:stretch>
-            <a:fillRect/>
-          </a:stretch>
-        </p:blipFill>
-        <p:spPr>
-          <a:xfrm>
-            <a:off x="1793813" y="1600200"/>
-            <a:ext cx="8604068" cy="1371600"/>
-          </a:xfrm>
-          <a:prstGeom prst="rect">
-            <a:avLst/>
-          </a:prstGeom>
-        </p:spPr>
-      </p:pic>
-      <p:sp>
-        <p:nvSpPr>
-          <p:cNvPr id="8" name="TextBox 7"/>
-          <p:cNvSpPr txBox="1"/>
-          <p:nvPr/>
-        </p:nvSpPr>
-        <p:spPr>
-          <a:xfrm>
-            <a:off x="502920" y="3063240"/>
-            <a:ext cx="10789920" cy="1645920"/>
-          </a:xfrm>
-          <a:prstGeom prst="rect">
-            <a:avLst/>
-          </a:prstGeom>
-          <a:noFill/>
-        </p:spPr>
-        <p:txBody>
-          <a:bodyPr wrap="square" anchor="t" lIns="0" rIns="0">
-            <a:spAutoFit/>
-          </a:bodyPr>
-          <a:lstStyle/>
-          <a:p>
-            <a:pPr>
-              <a:lnSpc>
-                <a:spcPct val="106000"/>
-              </a:lnSpc>
-              <a:spcAft>
-                <a:spcPts val="800"/>
-              </a:spcAft>
-            </a:pPr>
-            <a:r>
-              <a:rPr sz="1400">
-                <a:solidFill>
-                  <a:srgbClr val="5C6355"/>
-                </a:solidFill>
-                <a:latin typeface="Calibri"/>
-              </a:rPr>
-              <a:t>▪  </a:t>
-            </a:r>
-            <a:r>
-              <a:rPr sz="1400">
-                <a:solidFill>
-                  <a:srgbClr val="1C2119"/>
-                </a:solidFill>
-                <a:latin typeface="Calibri"/>
-              </a:rPr>
-              <a:t>r (light/temperature-limited growth), K (water-limited carrying capacity), and m (drought/freeze-driven mortality) are each fit as their own small network from this equation's structure, then frozen and used as a physics-consistency loss while LoRA fine-tuning Chronos-2.</a:t>
-            </a:r>
-          </a:p>
-          <a:p>
-            <a:pPr>
-              <a:lnSpc>
-                <a:spcPct val="106000"/>
-              </a:lnSpc>
-              <a:spcAft>
-                <a:spcPts val="800"/>
-              </a:spcAft>
-            </a:pPr>
-            <a:r>
-              <a:rPr sz="1400">
-                <a:solidFill>
-                  <a:srgbClr val="5C6355"/>
-                </a:solidFill>
-                <a:latin typeface="Calibri"/>
-              </a:rPr>
-              <a:t>▪  </a:t>
-            </a:r>
-            <a:r>
-              <a:rPr sz="1400">
-                <a:solidFill>
-                  <a:srgbClr val="1C2119"/>
-                </a:solidFill>
-                <a:latin typeface="Calibri"/>
-              </a:rPr>
-              <a:t>Validated standalone on LAI first (clean fit, Pearson r mean 0.78) before using it to fine-tune Chronos-2 - see the companion physics-guided-fine-tuning deck for that step.</a:t>
-            </a:r>
-          </a:p>
-        </p:txBody>
-      </p:sp>
-      <p:sp>
-        <p:nvSpPr>
-          <p:cNvPr id="9" name="Rectangle 8"/>
-          <p:cNvSpPr/>
-          <p:nvPr/>
-        </p:nvSpPr>
-        <p:spPr>
-          <a:xfrm>
-            <a:off x="0" y="6144768"/>
-            <a:ext cx="12191695" cy="713232"/>
-          </a:xfrm>
-          <a:prstGeom prst="rect">
-            <a:avLst/>
-          </a:prstGeom>
-          <a:solidFill>
-            <a:srgbClr val="E2ECFA"/>
-          </a:solidFill>
-          <a:ln>
-            <a:noFill/>
-          </a:ln>
-          <a:effectLst/>
-        </p:spPr>
-        <p:style>
-          <a:lnRef idx="1">
-            <a:schemeClr val="accent1"/>
-          </a:lnRef>
-          <a:fillRef idx="3">
-            <a:schemeClr val="accent1"/>
-          </a:fillRef>
-          <a:effectRef idx="2">
-            <a:schemeClr val="accent1"/>
-          </a:effectRef>
-          <a:fontRef idx="minor">
-            <a:schemeClr val="lt1"/>
-          </a:fontRef>
-        </p:style>
-        <p:txBody>
-          <a:bodyPr rtlCol="0" anchor="ctr"/>
-          <a:lstStyle/>
-          <a:p>
-            <a:pPr algn="ctr"/>
-          </a:p>
-        </p:txBody>
-      </p:sp>
-      <p:sp>
-        <p:nvSpPr>
-          <p:cNvPr id="10" name="Rectangle 9"/>
-          <p:cNvSpPr/>
-          <p:nvPr/>
-        </p:nvSpPr>
-        <p:spPr>
-          <a:xfrm>
-            <a:off x="0" y="6144768"/>
-            <a:ext cx="109728" cy="713232"/>
-          </a:xfrm>
-          <a:prstGeom prst="rect">
-            <a:avLst/>
-          </a:prstGeom>
-          <a:solidFill>
-            <a:srgbClr val="2A78D6"/>
-          </a:solidFill>
-          <a:ln>
-            <a:noFill/>
-          </a:ln>
-          <a:effectLst/>
-        </p:spPr>
-        <p:style>
-          <a:lnRef idx="1">
-            <a:schemeClr val="accent1"/>
-          </a:lnRef>
-          <a:fillRef idx="3">
-            <a:schemeClr val="accent1"/>
-          </a:fillRef>
-          <a:effectRef idx="2">
-            <a:schemeClr val="accent1"/>
-          </a:effectRef>
-          <a:fontRef idx="minor">
-            <a:schemeClr val="lt1"/>
-          </a:fontRef>
-        </p:style>
-        <p:txBody>
-          <a:bodyPr rtlCol="0" anchor="ctr"/>
-          <a:lstStyle/>
-          <a:p>
-            <a:pPr algn="ctr"/>
-          </a:p>
-        </p:txBody>
-      </p:sp>
-      <p:sp>
-        <p:nvSpPr>
-          <p:cNvPr id="11" name="TextBox 10"/>
-          <p:cNvSpPr txBox="1"/>
-          <p:nvPr/>
-        </p:nvSpPr>
-        <p:spPr>
-          <a:xfrm>
-            <a:off x="411480" y="6144768"/>
-            <a:ext cx="11368735" cy="713232"/>
-          </a:xfrm>
-          <a:prstGeom prst="rect">
-            <a:avLst/>
-          </a:prstGeom>
-          <a:noFill/>
-        </p:spPr>
-        <p:txBody>
-          <a:bodyPr wrap="square" anchor="ctr" lIns="0" rIns="0" tIns="0" bIns="0">
-            <a:spAutoFit/>
-          </a:bodyPr>
-          <a:lstStyle/>
-          <a:p>
-            <a:pPr algn="l">
-              <a:lnSpc>
-                <a:spcPct val="100000"/>
-              </a:lnSpc>
-            </a:pPr>
-            <a:r>
-              <a:rPr sz="1200" b="1" i="0">
-                <a:solidFill>
-                  <a:srgbClr val="143A6B"/>
-                </a:solidFill>
-                <a:latin typeface="Calibri"/>
-              </a:rPr>
-              <a:t>TAKEAWAY   </a:t>
-            </a:r>
-          </a:p>
-        </p:txBody>
-      </p:sp>
-      <p:sp>
-        <p:nvSpPr>
-          <p:cNvPr id="12" name="TextBox 11"/>
-          <p:cNvSpPr txBox="1"/>
-          <p:nvPr/>
-        </p:nvSpPr>
-        <p:spPr>
-          <a:xfrm>
-            <a:off x="1417320" y="6144768"/>
-            <a:ext cx="10362895" cy="713232"/>
-          </a:xfrm>
-          <a:prstGeom prst="rect">
-            <a:avLst/>
-          </a:prstGeom>
-          <a:noFill/>
-        </p:spPr>
-        <p:txBody>
-          <a:bodyPr wrap="square" anchor="ctr" lIns="0" rIns="0" tIns="0" bIns="0">
-            <a:spAutoFit/>
-          </a:bodyPr>
-          <a:lstStyle/>
-          <a:p>
-            <a:pPr algn="l">
-              <a:lnSpc>
-                <a:spcPct val="100000"/>
-              </a:lnSpc>
-            </a:pPr>
-            <a:r>
-              <a:rPr sz="1450" b="1" i="0">
-                <a:solidFill>
-                  <a:srgbClr val="143A6B"/>
-                </a:solidFill>
-                <a:latin typeface="Calibri"/>
-              </a:rPr>
-              <a:t>Same 3 project sites as the earlier validation, now across all 11 LOYO years (33 folds) - a broader test before drawing conclusions.</a:t>
-            </a:r>
-          </a:p>
-        </p:txBody>
-      </p:sp>
-    </p:spTree>
-  </p:cSld>
-  <p:clrMapOvr>
-    <a:masterClrMapping/>
-  </p:clrMapOvr>
-</p:sld>
-</file>
-
 <file path=ppt/slides/slide5.xml><?xml version="1.0" encoding="utf-8"?>
 <p:sld xmlns:a="http://schemas.openxmlformats.org/drawingml/2006/main" xmlns:p="http://schemas.openxmlformats.org/presentationml/2006/main" xmlns:r="http://schemas.openxmlformats.org/officeDocument/2006/relationships">
   <p:cSld>
@@ -4972,7 +4857,7 @@
                 </a:solidFill>
                 <a:latin typeface="Calibri"/>
               </a:rPr>
-              <a:t>Result: Physics-Guided Fine-Tuning Beats Raw Chronos-2</a:t>
+              <a:t>Part 2: Fine-Tuning with the Exact Growth-Mortality Equation</a:t>
             </a:r>
           </a:p>
         </p:txBody>
@@ -5060,9 +4945,48 @@
           </a:p>
         </p:txBody>
       </p:sp>
+      <p:sp>
+        <p:nvSpPr>
+          <p:cNvPr id="6" name="TextBox 5"/>
+          <p:cNvSpPr txBox="1"/>
+          <p:nvPr/>
+        </p:nvSpPr>
+        <p:spPr>
+          <a:xfrm>
+            <a:off x="502920" y="1143000"/>
+            <a:ext cx="10789920" cy="320040"/>
+          </a:xfrm>
+          <a:prstGeom prst="rect">
+            <a:avLst/>
+          </a:prstGeom>
+          <a:noFill/>
+        </p:spPr>
+        <p:txBody>
+          <a:bodyPr wrap="square" anchor="t" lIns="0" rIns="0" tIns="0" bIns="0">
+            <a:spAutoFit/>
+          </a:bodyPr>
+          <a:lstStyle/>
+          <a:p>
+            <a:pPr algn="l">
+              <a:lnSpc>
+                <a:spcPct val="100000"/>
+              </a:lnSpc>
+            </a:pPr>
+            <a:r>
+              <a:rPr sz="1450" b="0" i="0">
+                <a:solidFill>
+                  <a:srgbClr val="1C2119"/>
+                </a:solidFill>
+                <a:latin typeface="Calibri"/>
+              </a:rPr>
+              <a:t>Prof. Wang's diagnosis: the earlier ad hoc physics term library undersold the physics - this is the equation she actually meant:</a:t>
+            </a:r>
+          </a:p>
+        </p:txBody>
+      </p:sp>
       <p:pic>
         <p:nvPicPr>
-          <p:cNvPr id="6" name="Picture 5" descr="comparison_boxplot.png"/>
+          <p:cNvPr id="7" name="Picture 6" descr="phenology_equation.png"/>
           <p:cNvPicPr>
             <a:picLocks noChangeAspect="1"/>
           </p:cNvPicPr>
@@ -5076,53 +5000,14 @@
         </p:blipFill>
         <p:spPr>
           <a:xfrm>
-            <a:off x="502920" y="1495859"/>
-            <a:ext cx="7132320" cy="4158889"/>
+            <a:off x="1793813" y="1600200"/>
+            <a:ext cx="8604068" cy="1371600"/>
           </a:xfrm>
           <a:prstGeom prst="rect">
             <a:avLst/>
           </a:prstGeom>
         </p:spPr>
       </p:pic>
-      <p:sp>
-        <p:nvSpPr>
-          <p:cNvPr id="7" name="TextBox 6"/>
-          <p:cNvSpPr txBox="1"/>
-          <p:nvPr/>
-        </p:nvSpPr>
-        <p:spPr>
-          <a:xfrm>
-            <a:off x="7772400" y="1143000"/>
-            <a:ext cx="3931920" cy="274320"/>
-          </a:xfrm>
-          <a:prstGeom prst="rect">
-            <a:avLst/>
-          </a:prstGeom>
-          <a:noFill/>
-        </p:spPr>
-        <p:txBody>
-          <a:bodyPr wrap="square" anchor="t" lIns="0" rIns="0" tIns="0" bIns="0">
-            <a:spAutoFit/>
-          </a:bodyPr>
-          <a:lstStyle/>
-          <a:p>
-            <a:pPr algn="l">
-              <a:lnSpc>
-                <a:spcPct val="100000"/>
-              </a:lnSpc>
-            </a:pPr>
-            <a:r>
-              <a:rPr sz="1300" b="1" i="0">
-                <a:solidFill>
-                  <a:srgbClr val="1E4A33"/>
-                </a:solidFill>
-                <a:latin typeface="Calibri"/>
-              </a:rPr>
-              <a:t>33 LOYO-CV FOLDS</a:t>
-            </a:r>
-          </a:p>
-        </p:txBody>
-      </p:sp>
       <p:sp>
         <p:nvSpPr>
           <p:cNvPr id="8" name="TextBox 7"/>
@@ -5131,8 +5016,8 @@
         </p:nvSpPr>
         <p:spPr>
           <a:xfrm>
-            <a:off x="7772400" y="1508760"/>
-            <a:ext cx="3931920" cy="2103120"/>
+            <a:off x="502920" y="3063240"/>
+            <a:ext cx="10789920" cy="1645920"/>
           </a:xfrm>
           <a:prstGeom prst="rect">
             <a:avLst/>
@@ -5154,22 +5039,22 @@
               </a:spcAft>
             </a:pPr>
             <a:r>
-              <a:rPr sz="1300">
-                <a:solidFill>
-                  <a:srgbClr val="0CA30C"/>
+              <a:rPr sz="1400">
+                <a:solidFill>
+                  <a:srgbClr val="5C6355"/>
                 </a:solidFill>
                 <a:latin typeface="Calibri"/>
               </a:rPr>
               <a:t>▪  </a:t>
             </a:r>
             <a:r>
-              <a:rPr sz="1300">
+              <a:rPr sz="1400">
                 <a:solidFill>
                   <a:srgbClr val="1C2119"/>
                 </a:solidFill>
                 <a:latin typeface="Calibri"/>
               </a:rPr>
-              <a:t>Mean R²: zero-shot 0.380 → physics-guided 0.424.</a:t>
+              <a:t>r (light/temperature-limited growth), K (water-limited carrying capacity), and m (drought/freeze-driven mortality) are each fit as their own small network from this equation's structure, then frozen and used as a physics-consistency loss while LoRA fine-tuning Chronos-2.</a:t>
             </a:r>
           </a:p>
           <a:p>
@@ -5182,175 +5067,29 @@
               </a:spcAft>
             </a:pPr>
             <a:r>
-              <a:rPr sz="1300">
-                <a:solidFill>
-                  <a:srgbClr val="0CA30C"/>
+              <a:rPr sz="1400">
+                <a:solidFill>
+                  <a:srgbClr val="5C6355"/>
                 </a:solidFill>
                 <a:latin typeface="Calibri"/>
               </a:rPr>
               <a:t>▪  </a:t>
             </a:r>
             <a:r>
-              <a:rPr sz="1300">
+              <a:rPr sz="1400">
                 <a:solidFill>
                   <a:srgbClr val="1C2119"/>
                 </a:solidFill>
                 <a:latin typeface="Calibri"/>
               </a:rPr>
-              <a:t>Median R²: zero-shot 0.644 → physics-guided 0.674.</a:t>
-            </a:r>
-          </a:p>
-          <a:p>
-            <a:pPr>
-              <a:lnSpc>
-                <a:spcPct val="106000"/>
-              </a:lnSpc>
-              <a:spcAft>
-                <a:spcPts val="800"/>
-              </a:spcAft>
-            </a:pPr>
-            <a:r>
-              <a:rPr sz="1300">
-                <a:solidFill>
-                  <a:srgbClr val="0CA30C"/>
-                </a:solidFill>
-                <a:latin typeface="Calibri"/>
-              </a:rPr>
-              <a:t>▪  </a:t>
-            </a:r>
-            <a:r>
-              <a:rPr sz="1300">
-                <a:solidFill>
-                  <a:srgbClr val="1C2119"/>
-                </a:solidFill>
-                <a:latin typeface="Calibri"/>
-              </a:rPr>
-              <a:t>Plain fine-tuning (no physics) actually UNDERPERFORMS zero-shot (mean 0.287) - small-sample fine-tuning alone tends to overfit. The physics term fixes this AND pushes past zero-shot.</a:t>
-            </a:r>
-          </a:p>
-          <a:p>
-            <a:pPr>
-              <a:lnSpc>
-                <a:spcPct val="106000"/>
-              </a:lnSpc>
-              <a:spcAft>
-                <a:spcPts val="800"/>
-              </a:spcAft>
-            </a:pPr>
-            <a:r>
-              <a:rPr sz="1300">
-                <a:solidFill>
-                  <a:srgbClr val="0CA30C"/>
-                </a:solidFill>
-                <a:latin typeface="Calibri"/>
-              </a:rPr>
-              <a:t>▪  </a:t>
-            </a:r>
-            <a:r>
-              <a:rPr sz="1300">
-                <a:solidFill>
-                  <a:srgbClr val="1C2119"/>
-                </a:solidFill>
-                <a:latin typeface="Calibri"/>
-              </a:rPr>
-              <a:t>Physics-guided beats plain fine-tuning in 22/33 folds (67%).</a:t>
-            </a:r>
-          </a:p>
-        </p:txBody>
-      </p:sp>
-      <p:sp>
-        <p:nvSpPr>
-          <p:cNvPr id="9" name="TextBox 8"/>
-          <p:cNvSpPr txBox="1"/>
-          <p:nvPr/>
-        </p:nvSpPr>
-        <p:spPr>
-          <a:xfrm>
-            <a:off x="7772400" y="3886200"/>
-            <a:ext cx="3931920" cy="274320"/>
-          </a:xfrm>
-          <a:prstGeom prst="rect">
-            <a:avLst/>
-          </a:prstGeom>
-          <a:noFill/>
-        </p:spPr>
-        <p:txBody>
-          <a:bodyPr wrap="square" anchor="t" lIns="0" rIns="0" tIns="0" bIns="0">
-            <a:spAutoFit/>
-          </a:bodyPr>
-          <a:lstStyle/>
-          <a:p>
-            <a:pPr algn="l">
-              <a:lnSpc>
-                <a:spcPct val="100000"/>
-              </a:lnSpc>
-            </a:pPr>
-            <a:r>
-              <a:rPr sz="1300" b="1" i="0">
-                <a:solidFill>
-                  <a:srgbClr val="B5651D"/>
-                </a:solidFill>
-                <a:latin typeface="Calibri"/>
-              </a:rPr>
-              <a:t>WHERE IT HELPS MOST</a:t>
-            </a:r>
-          </a:p>
-        </p:txBody>
-      </p:sp>
-      <p:sp>
-        <p:nvSpPr>
-          <p:cNvPr id="10" name="TextBox 9"/>
-          <p:cNvSpPr txBox="1"/>
-          <p:nvPr/>
-        </p:nvSpPr>
-        <p:spPr>
-          <a:xfrm>
-            <a:off x="7772400" y="4251960"/>
-            <a:ext cx="3931920" cy="1463040"/>
-          </a:xfrm>
-          <a:prstGeom prst="rect">
-            <a:avLst/>
-          </a:prstGeom>
-          <a:noFill/>
-        </p:spPr>
-        <p:txBody>
-          <a:bodyPr wrap="square" anchor="t" lIns="0" rIns="0">
-            <a:spAutoFit/>
-          </a:bodyPr>
-          <a:lstStyle/>
-          <a:p>
-            <a:pPr>
-              <a:lnSpc>
-                <a:spcPct val="106000"/>
-              </a:lnSpc>
-              <a:spcAft>
-                <a:spcPts val="600"/>
-              </a:spcAft>
-            </a:pPr>
-            <a:r>
-              <a:rPr sz="1250">
-                <a:solidFill>
-                  <a:srgbClr val="B5651D"/>
-                </a:solidFill>
-                <a:latin typeface="Calibri"/>
-              </a:rPr>
-              <a:t>▪  </a:t>
-            </a:r>
-            <a:r>
-              <a:rPr sz="1250">
-                <a:solidFill>
-                  <a:srgbClr val="1C2119"/>
-                </a:solidFill>
-                <a:latin typeface="Calibri"/>
-              </a:rPr>
-              <a:t>Biggest gains on the two sites with weaker zero-shot baselines (evergreen, low_amplitude); roughly neutral on the site already near its R² ceiling (high_amplitude_deciduous, R²≈0.96) - little room left to improve there.</a:t>
-            </a:r>
-          </a:p>
-        </p:txBody>
-      </p:sp>
-      <p:sp>
-        <p:nvSpPr>
-          <p:cNvPr id="11" name="Rectangle 10"/>
+              <a:t>Validated standalone on LAI first (clean fit, Pearson r mean 0.78) before using it to fine-tune Chronos-2 - see the companion physics-guided-fine-tuning deck for that step.</a:t>
+            </a:r>
+          </a:p>
+        </p:txBody>
+      </p:sp>
+      <p:sp>
+        <p:nvSpPr>
+          <p:cNvPr id="9" name="Rectangle 8"/>
           <p:cNvSpPr/>
           <p:nvPr/>
         </p:nvSpPr>
@@ -5363,7 +5102,7 @@
             <a:avLst/>
           </a:prstGeom>
           <a:solidFill>
-            <a:srgbClr val="E3F5E3"/>
+            <a:srgbClr val="E2ECFA"/>
           </a:solidFill>
           <a:ln>
             <a:noFill/>
@@ -5394,7 +5133,7 @@
       </p:sp>
       <p:sp>
         <p:nvSpPr>
-          <p:cNvPr id="12" name="Rectangle 11"/>
+          <p:cNvPr id="10" name="Rectangle 9"/>
           <p:cNvSpPr/>
           <p:nvPr/>
         </p:nvSpPr>
@@ -5407,7 +5146,7 @@
             <a:avLst/>
           </a:prstGeom>
           <a:solidFill>
-            <a:srgbClr val="0CA30C"/>
+            <a:srgbClr val="2A78D6"/>
           </a:solidFill>
           <a:ln>
             <a:noFill/>
@@ -5438,7 +5177,7 @@
       </p:sp>
       <p:sp>
         <p:nvSpPr>
-          <p:cNvPr id="13" name="TextBox 12"/>
+          <p:cNvPr id="11" name="TextBox 10"/>
           <p:cNvSpPr txBox="1"/>
           <p:nvPr/>
         </p:nvSpPr>
@@ -5466,7 +5205,7 @@
             <a:r>
               <a:rPr sz="1200" b="1" i="0">
                 <a:solidFill>
-                  <a:srgbClr val="0A5A0A"/>
+                  <a:srgbClr val="143A6B"/>
                 </a:solidFill>
                 <a:latin typeface="Calibri"/>
               </a:rPr>
@@ -5477,7 +5216,7 @@
       </p:sp>
       <p:sp>
         <p:nvSpPr>
-          <p:cNvPr id="14" name="TextBox 13"/>
+          <p:cNvPr id="12" name="TextBox 11"/>
           <p:cNvSpPr txBox="1"/>
           <p:nvPr/>
         </p:nvSpPr>
@@ -5505,11 +5244,1719 @@
             <a:r>
               <a:rPr sz="1450" b="1" i="0">
                 <a:solidFill>
+                  <a:srgbClr val="143A6B"/>
+                </a:solidFill>
+                <a:latin typeface="Calibri"/>
+              </a:rPr>
+              <a:t>Same 3 project sites as the earlier validation, now across all 11 LOYO years (33 folds) - a broader test before drawing conclusions.</a:t>
+            </a:r>
+          </a:p>
+        </p:txBody>
+      </p:sp>
+    </p:spTree>
+  </p:cSld>
+  <p:clrMapOvr>
+    <a:masterClrMapping/>
+  </p:clrMapOvr>
+</p:sld>
+</file>
+
+<file path=ppt/slides/slide6.xml><?xml version="1.0" encoding="utf-8"?>
+<p:sld xmlns:a="http://schemas.openxmlformats.org/drawingml/2006/main" xmlns:p="http://schemas.openxmlformats.org/presentationml/2006/main" xmlns:r="http://schemas.openxmlformats.org/officeDocument/2006/relationships">
+  <p:cSld>
+    <p:bg>
+      <p:bgPr>
+        <a:solidFill>
+          <a:srgbClr val="FFFFFF"/>
+        </a:solidFill>
+        <a:effectLst/>
+      </p:bgPr>
+    </p:bg>
+    <p:spTree>
+      <p:nvGrpSpPr>
+        <p:cNvPr id="1" name=""/>
+        <p:cNvGrpSpPr/>
+        <p:nvPr/>
+      </p:nvGrpSpPr>
+      <p:grpSpPr/>
+      <p:sp>
+        <p:nvSpPr>
+          <p:cNvPr id="2" name="TextBox 1"/>
+          <p:cNvSpPr txBox="1"/>
+          <p:nvPr/>
+        </p:nvSpPr>
+        <p:spPr>
+          <a:xfrm>
+            <a:off x="502920" y="384048"/>
+            <a:ext cx="10972800" cy="292608"/>
+          </a:xfrm>
+          <a:prstGeom prst="rect">
+            <a:avLst/>
+          </a:prstGeom>
+          <a:noFill/>
+        </p:spPr>
+        <p:txBody>
+          <a:bodyPr wrap="square" anchor="t" lIns="0" rIns="0" tIns="0" bIns="0">
+            <a:spAutoFit/>
+          </a:bodyPr>
+          <a:lstStyle/>
+          <a:p>
+            <a:pPr algn="l">
+              <a:lnSpc>
+                <a:spcPct val="100000"/>
+              </a:lnSpc>
+            </a:pPr>
+            <a:r>
+              <a:rPr sz="1300" b="1" i="0">
+                <a:solidFill>
+                  <a:srgbClr val="2A78D6"/>
+                </a:solidFill>
+                <a:latin typeface="Calibri"/>
+              </a:rPr>
+              <a:t>PART 2 — PHYSICS-GUIDED FINE-TUNING</a:t>
+            </a:r>
+          </a:p>
+        </p:txBody>
+      </p:sp>
+      <p:sp>
+        <p:nvSpPr>
+          <p:cNvPr id="3" name="TextBox 2"/>
+          <p:cNvSpPr txBox="1"/>
+          <p:nvPr/>
+        </p:nvSpPr>
+        <p:spPr>
+          <a:xfrm>
+            <a:off x="502920" y="658368"/>
+            <a:ext cx="11155680" cy="566928"/>
+          </a:xfrm>
+          <a:prstGeom prst="rect">
+            <a:avLst/>
+          </a:prstGeom>
+          <a:noFill/>
+        </p:spPr>
+        <p:txBody>
+          <a:bodyPr wrap="square" anchor="t" lIns="0" rIns="0" tIns="0" bIns="0">
+            <a:spAutoFit/>
+          </a:bodyPr>
+          <a:lstStyle/>
+          <a:p>
+            <a:pPr algn="l">
+              <a:lnSpc>
+                <a:spcPct val="100000"/>
+              </a:lnSpc>
+            </a:pPr>
+            <a:r>
+              <a:rPr sz="2300" b="1" i="0">
+                <a:solidFill>
+                  <a:srgbClr val="1C2119"/>
+                </a:solidFill>
+                <a:latin typeface="Calibri"/>
+              </a:rPr>
+              <a:t>Part 2 Result: Actual Predictions, 3 Example Folds</a:t>
+            </a:r>
+          </a:p>
+        </p:txBody>
+      </p:sp>
+      <p:sp>
+        <p:nvSpPr>
+          <p:cNvPr id="4" name="Rectangle 3"/>
+          <p:cNvSpPr/>
+          <p:nvPr/>
+        </p:nvSpPr>
+        <p:spPr>
+          <a:xfrm>
+            <a:off x="502920" y="1261872"/>
+            <a:ext cx="914400" cy="38100"/>
+          </a:xfrm>
+          <a:prstGeom prst="rect">
+            <a:avLst/>
+          </a:prstGeom>
+          <a:solidFill>
+            <a:srgbClr val="2A78D6"/>
+          </a:solidFill>
+          <a:ln>
+            <a:noFill/>
+          </a:ln>
+          <a:effectLst/>
+        </p:spPr>
+        <p:style>
+          <a:lnRef idx="1">
+            <a:schemeClr val="accent1"/>
+          </a:lnRef>
+          <a:fillRef idx="3">
+            <a:schemeClr val="accent1"/>
+          </a:fillRef>
+          <a:effectRef idx="2">
+            <a:schemeClr val="accent1"/>
+          </a:effectRef>
+          <a:fontRef idx="minor">
+            <a:schemeClr val="lt1"/>
+          </a:fontRef>
+        </p:style>
+        <p:txBody>
+          <a:bodyPr rtlCol="0" anchor="ctr"/>
+          <a:lstStyle/>
+          <a:p>
+            <a:pPr algn="ctr"/>
+          </a:p>
+        </p:txBody>
+      </p:sp>
+      <p:sp>
+        <p:nvSpPr>
+          <p:cNvPr id="5" name="TextBox 4"/>
+          <p:cNvSpPr txBox="1"/>
+          <p:nvPr/>
+        </p:nvSpPr>
+        <p:spPr>
+          <a:xfrm>
+            <a:off x="11551615" y="384048"/>
+            <a:ext cx="365760" cy="274320"/>
+          </a:xfrm>
+          <a:prstGeom prst="rect">
+            <a:avLst/>
+          </a:prstGeom>
+          <a:noFill/>
+        </p:spPr>
+        <p:txBody>
+          <a:bodyPr wrap="square" anchor="t" lIns="0" rIns="0" tIns="0" bIns="0">
+            <a:spAutoFit/>
+          </a:bodyPr>
+          <a:lstStyle/>
+          <a:p>
+            <a:pPr algn="r">
+              <a:lnSpc>
+                <a:spcPct val="100000"/>
+              </a:lnSpc>
+            </a:pPr>
+            <a:r>
+              <a:rPr sz="1100" b="0" i="0">
+                <a:solidFill>
+                  <a:srgbClr val="8B9382"/>
+                </a:solidFill>
+                <a:latin typeface="Calibri"/>
+              </a:rPr>
+              <a:t>6</a:t>
+            </a:r>
+          </a:p>
+        </p:txBody>
+      </p:sp>
+      <p:pic>
+        <p:nvPicPr>
+          <p:cNvPr id="6" name="Picture 5" descr="example_prediction_curves.png"/>
+          <p:cNvPicPr>
+            <a:picLocks noChangeAspect="1"/>
+          </p:cNvPicPr>
+          <p:nvPr/>
+        </p:nvPicPr>
+        <p:blipFill>
+          <a:blip r:embed="rId2"/>
+          <a:stretch>
+            <a:fillRect/>
+          </a:stretch>
+        </p:blipFill>
+        <p:spPr>
+          <a:xfrm>
+            <a:off x="502920" y="1701099"/>
+            <a:ext cx="11185855" cy="3062609"/>
+          </a:xfrm>
+          <a:prstGeom prst="rect">
+            <a:avLst/>
+          </a:prstGeom>
+        </p:spPr>
+      </p:pic>
+      <p:sp>
+        <p:nvSpPr>
+          <p:cNvPr id="7" name="TextBox 6"/>
+          <p:cNvSpPr txBox="1"/>
+          <p:nvPr/>
+        </p:nvSpPr>
+        <p:spPr>
+          <a:xfrm>
+            <a:off x="502920" y="5413248"/>
+            <a:ext cx="11185855" cy="548640"/>
+          </a:xfrm>
+          <a:prstGeom prst="rect">
+            <a:avLst/>
+          </a:prstGeom>
+          <a:noFill/>
+        </p:spPr>
+        <p:txBody>
+          <a:bodyPr wrap="square" anchor="t" lIns="0" rIns="0" tIns="0" bIns="0">
+            <a:spAutoFit/>
+          </a:bodyPr>
+          <a:lstStyle/>
+          <a:p>
+            <a:pPr algn="l">
+              <a:lnSpc>
+                <a:spcPct val="100000"/>
+              </a:lnSpc>
+            </a:pPr>
+            <a:r>
+              <a:rPr sz="1200" b="0" i="1">
+                <a:solidFill>
+                  <a:srgbClr val="5C6355"/>
+                </a:solidFill>
+                <a:latin typeface="Calibri"/>
+              </a:rPr>
+              <a:t>Note: fine-tuning has real run-to-run variance at this sample size (re-running low_amplitude/2014 independently gave physics R²=0.06 here vs. 0.28 in the original 33-fold run - same direction of effect is not guaranteed on every individual re-run). The 33-fold aggregate (next slide) is the number to trust, not any single illustrative fold.</a:t>
+            </a:r>
+          </a:p>
+        </p:txBody>
+      </p:sp>
+      <p:sp>
+        <p:nvSpPr>
+          <p:cNvPr id="8" name="Rectangle 7"/>
+          <p:cNvSpPr/>
+          <p:nvPr/>
+        </p:nvSpPr>
+        <p:spPr>
+          <a:xfrm>
+            <a:off x="0" y="6144768"/>
+            <a:ext cx="12191695" cy="713232"/>
+          </a:xfrm>
+          <a:prstGeom prst="rect">
+            <a:avLst/>
+          </a:prstGeom>
+          <a:solidFill>
+            <a:srgbClr val="E2ECFA"/>
+          </a:solidFill>
+          <a:ln>
+            <a:noFill/>
+          </a:ln>
+          <a:effectLst/>
+        </p:spPr>
+        <p:style>
+          <a:lnRef idx="1">
+            <a:schemeClr val="accent1"/>
+          </a:lnRef>
+          <a:fillRef idx="3">
+            <a:schemeClr val="accent1"/>
+          </a:fillRef>
+          <a:effectRef idx="2">
+            <a:schemeClr val="accent1"/>
+          </a:effectRef>
+          <a:fontRef idx="minor">
+            <a:schemeClr val="lt1"/>
+          </a:fontRef>
+        </p:style>
+        <p:txBody>
+          <a:bodyPr rtlCol="0" anchor="ctr"/>
+          <a:lstStyle/>
+          <a:p>
+            <a:pPr algn="ctr"/>
+          </a:p>
+        </p:txBody>
+      </p:sp>
+      <p:sp>
+        <p:nvSpPr>
+          <p:cNvPr id="9" name="Rectangle 8"/>
+          <p:cNvSpPr/>
+          <p:nvPr/>
+        </p:nvSpPr>
+        <p:spPr>
+          <a:xfrm>
+            <a:off x="0" y="6144768"/>
+            <a:ext cx="109728" cy="713232"/>
+          </a:xfrm>
+          <a:prstGeom prst="rect">
+            <a:avLst/>
+          </a:prstGeom>
+          <a:solidFill>
+            <a:srgbClr val="2A78D6"/>
+          </a:solidFill>
+          <a:ln>
+            <a:noFill/>
+          </a:ln>
+          <a:effectLst/>
+        </p:spPr>
+        <p:style>
+          <a:lnRef idx="1">
+            <a:schemeClr val="accent1"/>
+          </a:lnRef>
+          <a:fillRef idx="3">
+            <a:schemeClr val="accent1"/>
+          </a:fillRef>
+          <a:effectRef idx="2">
+            <a:schemeClr val="accent1"/>
+          </a:effectRef>
+          <a:fontRef idx="minor">
+            <a:schemeClr val="lt1"/>
+          </a:fontRef>
+        </p:style>
+        <p:txBody>
+          <a:bodyPr rtlCol="0" anchor="ctr"/>
+          <a:lstStyle/>
+          <a:p>
+            <a:pPr algn="ctr"/>
+          </a:p>
+        </p:txBody>
+      </p:sp>
+      <p:sp>
+        <p:nvSpPr>
+          <p:cNvPr id="10" name="TextBox 9"/>
+          <p:cNvSpPr txBox="1"/>
+          <p:nvPr/>
+        </p:nvSpPr>
+        <p:spPr>
+          <a:xfrm>
+            <a:off x="411480" y="6144768"/>
+            <a:ext cx="11368735" cy="713232"/>
+          </a:xfrm>
+          <a:prstGeom prst="rect">
+            <a:avLst/>
+          </a:prstGeom>
+          <a:noFill/>
+        </p:spPr>
+        <p:txBody>
+          <a:bodyPr wrap="square" anchor="ctr" lIns="0" rIns="0" tIns="0" bIns="0">
+            <a:spAutoFit/>
+          </a:bodyPr>
+          <a:lstStyle/>
+          <a:p>
+            <a:pPr algn="l">
+              <a:lnSpc>
+                <a:spcPct val="100000"/>
+              </a:lnSpc>
+            </a:pPr>
+            <a:r>
+              <a:rPr sz="1200" b="1" i="0">
+                <a:solidFill>
+                  <a:srgbClr val="143A6B"/>
+                </a:solidFill>
+                <a:latin typeface="Calibri"/>
+              </a:rPr>
+              <a:t>TAKEAWAY   </a:t>
+            </a:r>
+          </a:p>
+        </p:txBody>
+      </p:sp>
+      <p:sp>
+        <p:nvSpPr>
+          <p:cNvPr id="11" name="TextBox 10"/>
+          <p:cNvSpPr txBox="1"/>
+          <p:nvPr/>
+        </p:nvSpPr>
+        <p:spPr>
+          <a:xfrm>
+            <a:off x="1417320" y="6144768"/>
+            <a:ext cx="10362895" cy="713232"/>
+          </a:xfrm>
+          <a:prstGeom prst="rect">
+            <a:avLst/>
+          </a:prstGeom>
+          <a:noFill/>
+        </p:spPr>
+        <p:txBody>
+          <a:bodyPr wrap="square" anchor="ctr" lIns="0" rIns="0" tIns="0" bIns="0">
+            <a:spAutoFit/>
+          </a:bodyPr>
+          <a:lstStyle/>
+          <a:p>
+            <a:pPr algn="l">
+              <a:lnSpc>
+                <a:spcPct val="100000"/>
+              </a:lnSpc>
+            </a:pPr>
+            <a:r>
+              <a:rPr sz="1450" b="1" i="0">
+                <a:solidFill>
+                  <a:srgbClr val="143A6B"/>
+                </a:solidFill>
+                <a:latin typeface="Calibri"/>
+              </a:rPr>
+              <a:t>Visibly closer to observed LAI on the two weaker-baseline examples; indistinguishable from zero-shot where zero-shot was already excellent.</a:t>
+            </a:r>
+          </a:p>
+        </p:txBody>
+      </p:sp>
+    </p:spTree>
+  </p:cSld>
+  <p:clrMapOvr>
+    <a:masterClrMapping/>
+  </p:clrMapOvr>
+</p:sld>
+</file>
+
+<file path=ppt/slides/slide7.xml><?xml version="1.0" encoding="utf-8"?>
+<p:sld xmlns:a="http://schemas.openxmlformats.org/drawingml/2006/main" xmlns:p="http://schemas.openxmlformats.org/presentationml/2006/main" xmlns:r="http://schemas.openxmlformats.org/officeDocument/2006/relationships">
+  <p:cSld>
+    <p:bg>
+      <p:bgPr>
+        <a:solidFill>
+          <a:srgbClr val="FFFFFF"/>
+        </a:solidFill>
+        <a:effectLst/>
+      </p:bgPr>
+    </p:bg>
+    <p:spTree>
+      <p:nvGrpSpPr>
+        <p:cNvPr id="1" name=""/>
+        <p:cNvGrpSpPr/>
+        <p:nvPr/>
+      </p:nvGrpSpPr>
+      <p:grpSpPr/>
+      <p:sp>
+        <p:nvSpPr>
+          <p:cNvPr id="2" name="TextBox 1"/>
+          <p:cNvSpPr txBox="1"/>
+          <p:nvPr/>
+        </p:nvSpPr>
+        <p:spPr>
+          <a:xfrm>
+            <a:off x="502920" y="384048"/>
+            <a:ext cx="10972800" cy="292608"/>
+          </a:xfrm>
+          <a:prstGeom prst="rect">
+            <a:avLst/>
+          </a:prstGeom>
+          <a:noFill/>
+        </p:spPr>
+        <p:txBody>
+          <a:bodyPr wrap="square" anchor="t" lIns="0" rIns="0" tIns="0" bIns="0">
+            <a:spAutoFit/>
+          </a:bodyPr>
+          <a:lstStyle/>
+          <a:p>
+            <a:pPr algn="l">
+              <a:lnSpc>
+                <a:spcPct val="100000"/>
+              </a:lnSpc>
+            </a:pPr>
+            <a:r>
+              <a:rPr sz="1300" b="1" i="0">
+                <a:solidFill>
+                  <a:srgbClr val="2A78D6"/>
+                </a:solidFill>
+                <a:latin typeface="Calibri"/>
+              </a:rPr>
+              <a:t>PART 2 — PHYSICS-GUIDED FINE-TUNING</a:t>
+            </a:r>
+          </a:p>
+        </p:txBody>
+      </p:sp>
+      <p:sp>
+        <p:nvSpPr>
+          <p:cNvPr id="3" name="TextBox 2"/>
+          <p:cNvSpPr txBox="1"/>
+          <p:nvPr/>
+        </p:nvSpPr>
+        <p:spPr>
+          <a:xfrm>
+            <a:off x="502920" y="658368"/>
+            <a:ext cx="11155680" cy="566928"/>
+          </a:xfrm>
+          <a:prstGeom prst="rect">
+            <a:avLst/>
+          </a:prstGeom>
+          <a:noFill/>
+        </p:spPr>
+        <p:txBody>
+          <a:bodyPr wrap="square" anchor="t" lIns="0" rIns="0" tIns="0" bIns="0">
+            <a:spAutoFit/>
+          </a:bodyPr>
+          <a:lstStyle/>
+          <a:p>
+            <a:pPr algn="l">
+              <a:lnSpc>
+                <a:spcPct val="100000"/>
+              </a:lnSpc>
+            </a:pPr>
+            <a:r>
+              <a:rPr sz="2300" b="1" i="0">
+                <a:solidFill>
+                  <a:srgbClr val="1C2119"/>
+                </a:solidFill>
+                <a:latin typeface="Calibri"/>
+              </a:rPr>
+              <a:t>Result: Physics-Guided Fine-Tuning Beats Raw Chronos-2</a:t>
+            </a:r>
+          </a:p>
+        </p:txBody>
+      </p:sp>
+      <p:sp>
+        <p:nvSpPr>
+          <p:cNvPr id="4" name="Rectangle 3"/>
+          <p:cNvSpPr/>
+          <p:nvPr/>
+        </p:nvSpPr>
+        <p:spPr>
+          <a:xfrm>
+            <a:off x="502920" y="1261872"/>
+            <a:ext cx="914400" cy="38100"/>
+          </a:xfrm>
+          <a:prstGeom prst="rect">
+            <a:avLst/>
+          </a:prstGeom>
+          <a:solidFill>
+            <a:srgbClr val="2A78D6"/>
+          </a:solidFill>
+          <a:ln>
+            <a:noFill/>
+          </a:ln>
+          <a:effectLst/>
+        </p:spPr>
+        <p:style>
+          <a:lnRef idx="1">
+            <a:schemeClr val="accent1"/>
+          </a:lnRef>
+          <a:fillRef idx="3">
+            <a:schemeClr val="accent1"/>
+          </a:fillRef>
+          <a:effectRef idx="2">
+            <a:schemeClr val="accent1"/>
+          </a:effectRef>
+          <a:fontRef idx="minor">
+            <a:schemeClr val="lt1"/>
+          </a:fontRef>
+        </p:style>
+        <p:txBody>
+          <a:bodyPr rtlCol="0" anchor="ctr"/>
+          <a:lstStyle/>
+          <a:p>
+            <a:pPr algn="ctr"/>
+          </a:p>
+        </p:txBody>
+      </p:sp>
+      <p:sp>
+        <p:nvSpPr>
+          <p:cNvPr id="5" name="TextBox 4"/>
+          <p:cNvSpPr txBox="1"/>
+          <p:nvPr/>
+        </p:nvSpPr>
+        <p:spPr>
+          <a:xfrm>
+            <a:off x="11551615" y="384048"/>
+            <a:ext cx="365760" cy="274320"/>
+          </a:xfrm>
+          <a:prstGeom prst="rect">
+            <a:avLst/>
+          </a:prstGeom>
+          <a:noFill/>
+        </p:spPr>
+        <p:txBody>
+          <a:bodyPr wrap="square" anchor="t" lIns="0" rIns="0" tIns="0" bIns="0">
+            <a:spAutoFit/>
+          </a:bodyPr>
+          <a:lstStyle/>
+          <a:p>
+            <a:pPr algn="r">
+              <a:lnSpc>
+                <a:spcPct val="100000"/>
+              </a:lnSpc>
+            </a:pPr>
+            <a:r>
+              <a:rPr sz="1100" b="0" i="0">
+                <a:solidFill>
+                  <a:srgbClr val="8B9382"/>
+                </a:solidFill>
+                <a:latin typeface="Calibri"/>
+              </a:rPr>
+              <a:t>7</a:t>
+            </a:r>
+          </a:p>
+        </p:txBody>
+      </p:sp>
+      <p:pic>
+        <p:nvPicPr>
+          <p:cNvPr id="6" name="Picture 5" descr="comparison_boxplot.png"/>
+          <p:cNvPicPr>
+            <a:picLocks noChangeAspect="1"/>
+          </p:cNvPicPr>
+          <p:nvPr/>
+        </p:nvPicPr>
+        <p:blipFill>
+          <a:blip r:embed="rId2"/>
+          <a:stretch>
+            <a:fillRect/>
+          </a:stretch>
+        </p:blipFill>
+        <p:spPr>
+          <a:xfrm>
+            <a:off x="502920" y="1495859"/>
+            <a:ext cx="7132320" cy="4158889"/>
+          </a:xfrm>
+          <a:prstGeom prst="rect">
+            <a:avLst/>
+          </a:prstGeom>
+        </p:spPr>
+      </p:pic>
+      <p:sp>
+        <p:nvSpPr>
+          <p:cNvPr id="7" name="TextBox 6"/>
+          <p:cNvSpPr txBox="1"/>
+          <p:nvPr/>
+        </p:nvSpPr>
+        <p:spPr>
+          <a:xfrm>
+            <a:off x="7772400" y="1143000"/>
+            <a:ext cx="3931920" cy="274320"/>
+          </a:xfrm>
+          <a:prstGeom prst="rect">
+            <a:avLst/>
+          </a:prstGeom>
+          <a:noFill/>
+        </p:spPr>
+        <p:txBody>
+          <a:bodyPr wrap="square" anchor="t" lIns="0" rIns="0" tIns="0" bIns="0">
+            <a:spAutoFit/>
+          </a:bodyPr>
+          <a:lstStyle/>
+          <a:p>
+            <a:pPr algn="l">
+              <a:lnSpc>
+                <a:spcPct val="100000"/>
+              </a:lnSpc>
+            </a:pPr>
+            <a:r>
+              <a:rPr sz="1300" b="1" i="0">
+                <a:solidFill>
+                  <a:srgbClr val="1E4A33"/>
+                </a:solidFill>
+                <a:latin typeface="Calibri"/>
+              </a:rPr>
+              <a:t>33 LOYO-CV FOLDS</a:t>
+            </a:r>
+          </a:p>
+        </p:txBody>
+      </p:sp>
+      <p:sp>
+        <p:nvSpPr>
+          <p:cNvPr id="8" name="TextBox 7"/>
+          <p:cNvSpPr txBox="1"/>
+          <p:nvPr/>
+        </p:nvSpPr>
+        <p:spPr>
+          <a:xfrm>
+            <a:off x="7772400" y="1508760"/>
+            <a:ext cx="3931920" cy="2103120"/>
+          </a:xfrm>
+          <a:prstGeom prst="rect">
+            <a:avLst/>
+          </a:prstGeom>
+          <a:noFill/>
+        </p:spPr>
+        <p:txBody>
+          <a:bodyPr wrap="square" anchor="t" lIns="0" rIns="0">
+            <a:spAutoFit/>
+          </a:bodyPr>
+          <a:lstStyle/>
+          <a:p>
+            <a:pPr>
+              <a:lnSpc>
+                <a:spcPct val="106000"/>
+              </a:lnSpc>
+              <a:spcAft>
+                <a:spcPts val="800"/>
+              </a:spcAft>
+            </a:pPr>
+            <a:r>
+              <a:rPr sz="1300">
+                <a:solidFill>
+                  <a:srgbClr val="0CA30C"/>
+                </a:solidFill>
+                <a:latin typeface="Calibri"/>
+              </a:rPr>
+              <a:t>▪  </a:t>
+            </a:r>
+            <a:r>
+              <a:rPr sz="1300">
+                <a:solidFill>
+                  <a:srgbClr val="1C2119"/>
+                </a:solidFill>
+                <a:latin typeface="Calibri"/>
+              </a:rPr>
+              <a:t>Mean R²: zero-shot 0.380 → physics-guided 0.424.</a:t>
+            </a:r>
+          </a:p>
+          <a:p>
+            <a:pPr>
+              <a:lnSpc>
+                <a:spcPct val="106000"/>
+              </a:lnSpc>
+              <a:spcAft>
+                <a:spcPts val="800"/>
+              </a:spcAft>
+            </a:pPr>
+            <a:r>
+              <a:rPr sz="1300">
+                <a:solidFill>
+                  <a:srgbClr val="0CA30C"/>
+                </a:solidFill>
+                <a:latin typeface="Calibri"/>
+              </a:rPr>
+              <a:t>▪  </a:t>
+            </a:r>
+            <a:r>
+              <a:rPr sz="1300">
+                <a:solidFill>
+                  <a:srgbClr val="1C2119"/>
+                </a:solidFill>
+                <a:latin typeface="Calibri"/>
+              </a:rPr>
+              <a:t>Median R²: zero-shot 0.644 → physics-guided 0.674.</a:t>
+            </a:r>
+          </a:p>
+          <a:p>
+            <a:pPr>
+              <a:lnSpc>
+                <a:spcPct val="106000"/>
+              </a:lnSpc>
+              <a:spcAft>
+                <a:spcPts val="800"/>
+              </a:spcAft>
+            </a:pPr>
+            <a:r>
+              <a:rPr sz="1300">
+                <a:solidFill>
+                  <a:srgbClr val="0CA30C"/>
+                </a:solidFill>
+                <a:latin typeface="Calibri"/>
+              </a:rPr>
+              <a:t>▪  </a:t>
+            </a:r>
+            <a:r>
+              <a:rPr sz="1300">
+                <a:solidFill>
+                  <a:srgbClr val="1C2119"/>
+                </a:solidFill>
+                <a:latin typeface="Calibri"/>
+              </a:rPr>
+              <a:t>Plain fine-tuning (no physics) actually UNDERPERFORMS zero-shot (mean 0.287) - small-sample fine-tuning alone tends to overfit. The physics term fixes this AND pushes past zero-shot.</a:t>
+            </a:r>
+          </a:p>
+          <a:p>
+            <a:pPr>
+              <a:lnSpc>
+                <a:spcPct val="106000"/>
+              </a:lnSpc>
+              <a:spcAft>
+                <a:spcPts val="800"/>
+              </a:spcAft>
+            </a:pPr>
+            <a:r>
+              <a:rPr sz="1300">
+                <a:solidFill>
+                  <a:srgbClr val="0CA30C"/>
+                </a:solidFill>
+                <a:latin typeface="Calibri"/>
+              </a:rPr>
+              <a:t>▪  </a:t>
+            </a:r>
+            <a:r>
+              <a:rPr sz="1300">
+                <a:solidFill>
+                  <a:srgbClr val="1C2119"/>
+                </a:solidFill>
+                <a:latin typeface="Calibri"/>
+              </a:rPr>
+              <a:t>Physics-guided beats plain fine-tuning in 22/33 folds (67%).</a:t>
+            </a:r>
+          </a:p>
+        </p:txBody>
+      </p:sp>
+      <p:sp>
+        <p:nvSpPr>
+          <p:cNvPr id="9" name="TextBox 8"/>
+          <p:cNvSpPr txBox="1"/>
+          <p:nvPr/>
+        </p:nvSpPr>
+        <p:spPr>
+          <a:xfrm>
+            <a:off x="7772400" y="3886200"/>
+            <a:ext cx="3931920" cy="274320"/>
+          </a:xfrm>
+          <a:prstGeom prst="rect">
+            <a:avLst/>
+          </a:prstGeom>
+          <a:noFill/>
+        </p:spPr>
+        <p:txBody>
+          <a:bodyPr wrap="square" anchor="t" lIns="0" rIns="0" tIns="0" bIns="0">
+            <a:spAutoFit/>
+          </a:bodyPr>
+          <a:lstStyle/>
+          <a:p>
+            <a:pPr algn="l">
+              <a:lnSpc>
+                <a:spcPct val="100000"/>
+              </a:lnSpc>
+            </a:pPr>
+            <a:r>
+              <a:rPr sz="1300" b="1" i="0">
+                <a:solidFill>
+                  <a:srgbClr val="B5651D"/>
+                </a:solidFill>
+                <a:latin typeface="Calibri"/>
+              </a:rPr>
+              <a:t>WHERE IT HELPS MOST</a:t>
+            </a:r>
+          </a:p>
+        </p:txBody>
+      </p:sp>
+      <p:sp>
+        <p:nvSpPr>
+          <p:cNvPr id="10" name="TextBox 9"/>
+          <p:cNvSpPr txBox="1"/>
+          <p:nvPr/>
+        </p:nvSpPr>
+        <p:spPr>
+          <a:xfrm>
+            <a:off x="7772400" y="4251960"/>
+            <a:ext cx="3931920" cy="1463040"/>
+          </a:xfrm>
+          <a:prstGeom prst="rect">
+            <a:avLst/>
+          </a:prstGeom>
+          <a:noFill/>
+        </p:spPr>
+        <p:txBody>
+          <a:bodyPr wrap="square" anchor="t" lIns="0" rIns="0">
+            <a:spAutoFit/>
+          </a:bodyPr>
+          <a:lstStyle/>
+          <a:p>
+            <a:pPr>
+              <a:lnSpc>
+                <a:spcPct val="106000"/>
+              </a:lnSpc>
+              <a:spcAft>
+                <a:spcPts val="600"/>
+              </a:spcAft>
+            </a:pPr>
+            <a:r>
+              <a:rPr sz="1250">
+                <a:solidFill>
+                  <a:srgbClr val="B5651D"/>
+                </a:solidFill>
+                <a:latin typeface="Calibri"/>
+              </a:rPr>
+              <a:t>▪  </a:t>
+            </a:r>
+            <a:r>
+              <a:rPr sz="1250">
+                <a:solidFill>
+                  <a:srgbClr val="1C2119"/>
+                </a:solidFill>
+                <a:latin typeface="Calibri"/>
+              </a:rPr>
+              <a:t>Biggest gains on the two sites with weaker zero-shot baselines (evergreen, low_amplitude); roughly neutral on the site already near its R² ceiling (high_amplitude_deciduous, R²≈0.96) - little room left to improve there.</a:t>
+            </a:r>
+          </a:p>
+        </p:txBody>
+      </p:sp>
+      <p:sp>
+        <p:nvSpPr>
+          <p:cNvPr id="11" name="Rectangle 10"/>
+          <p:cNvSpPr/>
+          <p:nvPr/>
+        </p:nvSpPr>
+        <p:spPr>
+          <a:xfrm>
+            <a:off x="0" y="6144768"/>
+            <a:ext cx="12191695" cy="713232"/>
+          </a:xfrm>
+          <a:prstGeom prst="rect">
+            <a:avLst/>
+          </a:prstGeom>
+          <a:solidFill>
+            <a:srgbClr val="E3F5E3"/>
+          </a:solidFill>
+          <a:ln>
+            <a:noFill/>
+          </a:ln>
+          <a:effectLst/>
+        </p:spPr>
+        <p:style>
+          <a:lnRef idx="1">
+            <a:schemeClr val="accent1"/>
+          </a:lnRef>
+          <a:fillRef idx="3">
+            <a:schemeClr val="accent1"/>
+          </a:fillRef>
+          <a:effectRef idx="2">
+            <a:schemeClr val="accent1"/>
+          </a:effectRef>
+          <a:fontRef idx="minor">
+            <a:schemeClr val="lt1"/>
+          </a:fontRef>
+        </p:style>
+        <p:txBody>
+          <a:bodyPr rtlCol="0" anchor="ctr"/>
+          <a:lstStyle/>
+          <a:p>
+            <a:pPr algn="ctr"/>
+          </a:p>
+        </p:txBody>
+      </p:sp>
+      <p:sp>
+        <p:nvSpPr>
+          <p:cNvPr id="12" name="Rectangle 11"/>
+          <p:cNvSpPr/>
+          <p:nvPr/>
+        </p:nvSpPr>
+        <p:spPr>
+          <a:xfrm>
+            <a:off x="0" y="6144768"/>
+            <a:ext cx="109728" cy="713232"/>
+          </a:xfrm>
+          <a:prstGeom prst="rect">
+            <a:avLst/>
+          </a:prstGeom>
+          <a:solidFill>
+            <a:srgbClr val="0CA30C"/>
+          </a:solidFill>
+          <a:ln>
+            <a:noFill/>
+          </a:ln>
+          <a:effectLst/>
+        </p:spPr>
+        <p:style>
+          <a:lnRef idx="1">
+            <a:schemeClr val="accent1"/>
+          </a:lnRef>
+          <a:fillRef idx="3">
+            <a:schemeClr val="accent1"/>
+          </a:fillRef>
+          <a:effectRef idx="2">
+            <a:schemeClr val="accent1"/>
+          </a:effectRef>
+          <a:fontRef idx="minor">
+            <a:schemeClr val="lt1"/>
+          </a:fontRef>
+        </p:style>
+        <p:txBody>
+          <a:bodyPr rtlCol="0" anchor="ctr"/>
+          <a:lstStyle/>
+          <a:p>
+            <a:pPr algn="ctr"/>
+          </a:p>
+        </p:txBody>
+      </p:sp>
+      <p:sp>
+        <p:nvSpPr>
+          <p:cNvPr id="13" name="TextBox 12"/>
+          <p:cNvSpPr txBox="1"/>
+          <p:nvPr/>
+        </p:nvSpPr>
+        <p:spPr>
+          <a:xfrm>
+            <a:off x="411480" y="6144768"/>
+            <a:ext cx="11368735" cy="713232"/>
+          </a:xfrm>
+          <a:prstGeom prst="rect">
+            <a:avLst/>
+          </a:prstGeom>
+          <a:noFill/>
+        </p:spPr>
+        <p:txBody>
+          <a:bodyPr wrap="square" anchor="ctr" lIns="0" rIns="0" tIns="0" bIns="0">
+            <a:spAutoFit/>
+          </a:bodyPr>
+          <a:lstStyle/>
+          <a:p>
+            <a:pPr algn="l">
+              <a:lnSpc>
+                <a:spcPct val="100000"/>
+              </a:lnSpc>
+            </a:pPr>
+            <a:r>
+              <a:rPr sz="1200" b="1" i="0">
+                <a:solidFill>
                   <a:srgbClr val="0A5A0A"/>
                 </a:solidFill>
                 <a:latin typeface="Calibri"/>
               </a:rPr>
+              <a:t>TAKEAWAY   </a:t>
+            </a:r>
+          </a:p>
+        </p:txBody>
+      </p:sp>
+      <p:sp>
+        <p:nvSpPr>
+          <p:cNvPr id="14" name="TextBox 13"/>
+          <p:cNvSpPr txBox="1"/>
+          <p:nvPr/>
+        </p:nvSpPr>
+        <p:spPr>
+          <a:xfrm>
+            <a:off x="1417320" y="6144768"/>
+            <a:ext cx="10362895" cy="713232"/>
+          </a:xfrm>
+          <a:prstGeom prst="rect">
+            <a:avLst/>
+          </a:prstGeom>
+          <a:noFill/>
+        </p:spPr>
+        <p:txBody>
+          <a:bodyPr wrap="square" anchor="ctr" lIns="0" rIns="0" tIns="0" bIns="0">
+            <a:spAutoFit/>
+          </a:bodyPr>
+          <a:lstStyle/>
+          <a:p>
+            <a:pPr algn="l">
+              <a:lnSpc>
+                <a:spcPct val="100000"/>
+              </a:lnSpc>
+            </a:pPr>
+            <a:r>
+              <a:rPr sz="1450" b="1" i="0">
+                <a:solidFill>
+                  <a:srgbClr val="0A5A0A"/>
+                </a:solidFill>
+                <a:latin typeface="Calibri"/>
+              </a:rPr>
               <a:t>A genuine, aggregate improvement over raw zero-shot Chronos-2 - not on every single fold, but consistently in mean and median across 33 independent held-out years.</a:t>
+            </a:r>
+          </a:p>
+        </p:txBody>
+      </p:sp>
+    </p:spTree>
+  </p:cSld>
+  <p:clrMapOvr>
+    <a:masterClrMapping/>
+  </p:clrMapOvr>
+</p:sld>
+</file>
+
+<file path=ppt/slides/slide8.xml><?xml version="1.0" encoding="utf-8"?>
+<p:sld xmlns:a="http://schemas.openxmlformats.org/drawingml/2006/main" xmlns:p="http://schemas.openxmlformats.org/presentationml/2006/main" xmlns:r="http://schemas.openxmlformats.org/officeDocument/2006/relationships">
+  <p:cSld>
+    <p:bg>
+      <p:bgPr>
+        <a:solidFill>
+          <a:srgbClr val="FFFFFF"/>
+        </a:solidFill>
+        <a:effectLst/>
+      </p:bgPr>
+    </p:bg>
+    <p:spTree>
+      <p:nvGrpSpPr>
+        <p:cNvPr id="1" name=""/>
+        <p:cNvGrpSpPr/>
+        <p:nvPr/>
+      </p:nvGrpSpPr>
+      <p:grpSpPr/>
+      <p:sp>
+        <p:nvSpPr>
+          <p:cNvPr id="2" name="TextBox 1"/>
+          <p:cNvSpPr txBox="1"/>
+          <p:nvPr/>
+        </p:nvSpPr>
+        <p:spPr>
+          <a:xfrm>
+            <a:off x="502920" y="384048"/>
+            <a:ext cx="10972800" cy="292608"/>
+          </a:xfrm>
+          <a:prstGeom prst="rect">
+            <a:avLst/>
+          </a:prstGeom>
+          <a:noFill/>
+        </p:spPr>
+        <p:txBody>
+          <a:bodyPr wrap="square" anchor="t" lIns="0" rIns="0" tIns="0" bIns="0">
+            <a:spAutoFit/>
+          </a:bodyPr>
+          <a:lstStyle/>
+          <a:p>
+            <a:pPr algn="l">
+              <a:lnSpc>
+                <a:spcPct val="100000"/>
+              </a:lnSpc>
+            </a:pPr>
+            <a:r>
+              <a:rPr sz="1300" b="1" i="0">
+                <a:solidFill>
+                  <a:srgbClr val="2F6F5E"/>
+                </a:solidFill>
+                <a:latin typeface="Calibri"/>
+              </a:rPr>
+              <a:t>SUMMARY</a:t>
+            </a:r>
+          </a:p>
+        </p:txBody>
+      </p:sp>
+      <p:sp>
+        <p:nvSpPr>
+          <p:cNvPr id="3" name="TextBox 2"/>
+          <p:cNvSpPr txBox="1"/>
+          <p:nvPr/>
+        </p:nvSpPr>
+        <p:spPr>
+          <a:xfrm>
+            <a:off x="502920" y="658368"/>
+            <a:ext cx="11155680" cy="566928"/>
+          </a:xfrm>
+          <a:prstGeom prst="rect">
+            <a:avLst/>
+          </a:prstGeom>
+          <a:noFill/>
+        </p:spPr>
+        <p:txBody>
+          <a:bodyPr wrap="square" anchor="t" lIns="0" rIns="0" tIns="0" bIns="0">
+            <a:spAutoFit/>
+          </a:bodyPr>
+          <a:lstStyle/>
+          <a:p>
+            <a:pPr algn="l">
+              <a:lnSpc>
+                <a:spcPct val="100000"/>
+              </a:lnSpc>
+            </a:pPr>
+            <a:r>
+              <a:rPr sz="2300" b="1" i="0">
+                <a:solidFill>
+                  <a:srgbClr val="1C2119"/>
+                </a:solidFill>
+                <a:latin typeface="Calibri"/>
+              </a:rPr>
+              <a:t>Summary</a:t>
+            </a:r>
+          </a:p>
+        </p:txBody>
+      </p:sp>
+      <p:sp>
+        <p:nvSpPr>
+          <p:cNvPr id="4" name="Rectangle 3"/>
+          <p:cNvSpPr/>
+          <p:nvPr/>
+        </p:nvSpPr>
+        <p:spPr>
+          <a:xfrm>
+            <a:off x="502920" y="1261872"/>
+            <a:ext cx="914400" cy="38100"/>
+          </a:xfrm>
+          <a:prstGeom prst="rect">
+            <a:avLst/>
+          </a:prstGeom>
+          <a:solidFill>
+            <a:srgbClr val="2F6F5E"/>
+          </a:solidFill>
+          <a:ln>
+            <a:noFill/>
+          </a:ln>
+          <a:effectLst/>
+        </p:spPr>
+        <p:style>
+          <a:lnRef idx="1">
+            <a:schemeClr val="accent1"/>
+          </a:lnRef>
+          <a:fillRef idx="3">
+            <a:schemeClr val="accent1"/>
+          </a:fillRef>
+          <a:effectRef idx="2">
+            <a:schemeClr val="accent1"/>
+          </a:effectRef>
+          <a:fontRef idx="minor">
+            <a:schemeClr val="lt1"/>
+          </a:fontRef>
+        </p:style>
+        <p:txBody>
+          <a:bodyPr rtlCol="0" anchor="ctr"/>
+          <a:lstStyle/>
+          <a:p>
+            <a:pPr algn="ctr"/>
+          </a:p>
+        </p:txBody>
+      </p:sp>
+      <p:sp>
+        <p:nvSpPr>
+          <p:cNvPr id="5" name="TextBox 4"/>
+          <p:cNvSpPr txBox="1"/>
+          <p:nvPr/>
+        </p:nvSpPr>
+        <p:spPr>
+          <a:xfrm>
+            <a:off x="11551615" y="384048"/>
+            <a:ext cx="365760" cy="274320"/>
+          </a:xfrm>
+          <a:prstGeom prst="rect">
+            <a:avLst/>
+          </a:prstGeom>
+          <a:noFill/>
+        </p:spPr>
+        <p:txBody>
+          <a:bodyPr wrap="square" anchor="t" lIns="0" rIns="0" tIns="0" bIns="0">
+            <a:spAutoFit/>
+          </a:bodyPr>
+          <a:lstStyle/>
+          <a:p>
+            <a:pPr algn="r">
+              <a:lnSpc>
+                <a:spcPct val="100000"/>
+              </a:lnSpc>
+            </a:pPr>
+            <a:r>
+              <a:rPr sz="1100" b="0" i="0">
+                <a:solidFill>
+                  <a:srgbClr val="8B9382"/>
+                </a:solidFill>
+                <a:latin typeface="Calibri"/>
+              </a:rPr>
+              <a:t>8</a:t>
+            </a:r>
+          </a:p>
+        </p:txBody>
+      </p:sp>
+      <p:sp>
+        <p:nvSpPr>
+          <p:cNvPr id="6" name="TextBox 5"/>
+          <p:cNvSpPr txBox="1"/>
+          <p:nvPr/>
+        </p:nvSpPr>
+        <p:spPr>
+          <a:xfrm>
+            <a:off x="502920" y="1143000"/>
+            <a:ext cx="10789920" cy="274320"/>
+          </a:xfrm>
+          <a:prstGeom prst="rect">
+            <a:avLst/>
+          </a:prstGeom>
+          <a:noFill/>
+        </p:spPr>
+        <p:txBody>
+          <a:bodyPr wrap="square" anchor="t" lIns="0" rIns="0" tIns="0" bIns="0">
+            <a:spAutoFit/>
+          </a:bodyPr>
+          <a:lstStyle/>
+          <a:p>
+            <a:pPr algn="l">
+              <a:lnSpc>
+                <a:spcPct val="100000"/>
+              </a:lnSpc>
+            </a:pPr>
+            <a:r>
+              <a:rPr sz="1300" b="1" i="0">
+                <a:solidFill>
+                  <a:srgbClr val="1E4A33"/>
+                </a:solidFill>
+                <a:latin typeface="Calibri"/>
+              </a:rPr>
+              <a:t>PART 1</a:t>
+            </a:r>
+          </a:p>
+        </p:txBody>
+      </p:sp>
+      <p:sp>
+        <p:nvSpPr>
+          <p:cNvPr id="7" name="TextBox 6"/>
+          <p:cNvSpPr txBox="1"/>
+          <p:nvPr/>
+        </p:nvSpPr>
+        <p:spPr>
+          <a:xfrm>
+            <a:off x="502920" y="1463040"/>
+            <a:ext cx="10789920" cy="1188720"/>
+          </a:xfrm>
+          <a:prstGeom prst="rect">
+            <a:avLst/>
+          </a:prstGeom>
+          <a:noFill/>
+        </p:spPr>
+        <p:txBody>
+          <a:bodyPr wrap="square" anchor="t" lIns="0" rIns="0">
+            <a:spAutoFit/>
+          </a:bodyPr>
+          <a:lstStyle/>
+          <a:p>
+            <a:pPr>
+              <a:lnSpc>
+                <a:spcPct val="106000"/>
+              </a:lnSpc>
+              <a:spcAft>
+                <a:spcPts val="700"/>
+              </a:spcAft>
+            </a:pPr>
+            <a:r>
+              <a:rPr sz="1400">
+                <a:solidFill>
+                  <a:srgbClr val="2F6F5E"/>
+                </a:solidFill>
+                <a:latin typeface="Calibri"/>
+              </a:rPr>
+              <a:t>▪  </a:t>
+            </a:r>
+            <a:r>
+              <a:rPr sz="1400">
+                <a:solidFill>
+                  <a:srgbClr val="1C2119"/>
+                </a:solidFill>
+                <a:latin typeface="Calibri"/>
+              </a:rPr>
+              <a:t>Forecasting the LAI variation directly gives a modest, honest signal (Pearson r≈0.30 CONUS / 0.18 Global) - confirmed visually across 5 pixels spanning the full range from best to worst fit.</a:t>
+            </a:r>
+          </a:p>
+        </p:txBody>
+      </p:sp>
+      <p:sp>
+        <p:nvSpPr>
+          <p:cNvPr id="8" name="TextBox 7"/>
+          <p:cNvSpPr txBox="1"/>
+          <p:nvPr/>
+        </p:nvSpPr>
+        <p:spPr>
+          <a:xfrm>
+            <a:off x="502920" y="2834640"/>
+            <a:ext cx="10789920" cy="274320"/>
+          </a:xfrm>
+          <a:prstGeom prst="rect">
+            <a:avLst/>
+          </a:prstGeom>
+          <a:noFill/>
+        </p:spPr>
+        <p:txBody>
+          <a:bodyPr wrap="square" anchor="t" lIns="0" rIns="0" tIns="0" bIns="0">
+            <a:spAutoFit/>
+          </a:bodyPr>
+          <a:lstStyle/>
+          <a:p>
+            <a:pPr algn="l">
+              <a:lnSpc>
+                <a:spcPct val="100000"/>
+              </a:lnSpc>
+            </a:pPr>
+            <a:r>
+              <a:rPr sz="1300" b="1" i="0">
+                <a:solidFill>
+                  <a:srgbClr val="2A78D6"/>
+                </a:solidFill>
+                <a:latin typeface="Calibri"/>
+              </a:rPr>
+              <a:t>PART 2</a:t>
+            </a:r>
+          </a:p>
+        </p:txBody>
+      </p:sp>
+      <p:sp>
+        <p:nvSpPr>
+          <p:cNvPr id="9" name="TextBox 8"/>
+          <p:cNvSpPr txBox="1"/>
+          <p:nvPr/>
+        </p:nvSpPr>
+        <p:spPr>
+          <a:xfrm>
+            <a:off x="502920" y="3154680"/>
+            <a:ext cx="10789920" cy="1463040"/>
+          </a:xfrm>
+          <a:prstGeom prst="rect">
+            <a:avLst/>
+          </a:prstGeom>
+          <a:noFill/>
+        </p:spPr>
+        <p:txBody>
+          <a:bodyPr wrap="square" anchor="t" lIns="0" rIns="0">
+            <a:spAutoFit/>
+          </a:bodyPr>
+          <a:lstStyle/>
+          <a:p>
+            <a:pPr>
+              <a:lnSpc>
+                <a:spcPct val="106000"/>
+              </a:lnSpc>
+              <a:spcAft>
+                <a:spcPts val="700"/>
+              </a:spcAft>
+            </a:pPr>
+            <a:r>
+              <a:rPr sz="1400">
+                <a:solidFill>
+                  <a:srgbClr val="2A78D6"/>
+                </a:solidFill>
+                <a:latin typeface="Calibri"/>
+              </a:rPr>
+              <a:t>▪  </a:t>
+            </a:r>
+            <a:r>
+              <a:rPr sz="1400">
+                <a:solidFill>
+                  <a:srgbClr val="1C2119"/>
+                </a:solidFill>
+                <a:latin typeface="Calibri"/>
+              </a:rPr>
+              <a:t>Fine-tuning Chronos-2 with Prof. Wang's exact equation as a physics loss beats raw zero-shot Chronos-2 on both mean and median R² across 33 held-out years - a real, aggregate improvement, visible both in the numbers and in the actual predicted curves.</a:t>
+            </a:r>
+          </a:p>
+          <a:p>
+            <a:pPr>
+              <a:lnSpc>
+                <a:spcPct val="106000"/>
+              </a:lnSpc>
+              <a:spcAft>
+                <a:spcPts val="700"/>
+              </a:spcAft>
+            </a:pPr>
+            <a:r>
+              <a:rPr sz="1400">
+                <a:solidFill>
+                  <a:srgbClr val="2A78D6"/>
+                </a:solidFill>
+                <a:latin typeface="Calibri"/>
+              </a:rPr>
+              <a:t>▪  </a:t>
+            </a:r>
+            <a:r>
+              <a:rPr sz="1400">
+                <a:solidFill>
+                  <a:srgbClr val="1C2119"/>
+                </a:solidFill>
+                <a:latin typeface="Calibri"/>
+              </a:rPr>
+              <a:t>Plain fine-tuning alone (no physics) underperforms zero-shot - the physics term is doing real work, not just "fine-tuning helps regardless."</a:t>
+            </a:r>
+          </a:p>
+        </p:txBody>
+      </p:sp>
+      <p:sp>
+        <p:nvSpPr>
+          <p:cNvPr id="10" name="TextBox 9"/>
+          <p:cNvSpPr txBox="1"/>
+          <p:nvPr/>
+        </p:nvSpPr>
+        <p:spPr>
+          <a:xfrm>
+            <a:off x="502920" y="4892040"/>
+            <a:ext cx="10789920" cy="274320"/>
+          </a:xfrm>
+          <a:prstGeom prst="rect">
+            <a:avLst/>
+          </a:prstGeom>
+          <a:noFill/>
+        </p:spPr>
+        <p:txBody>
+          <a:bodyPr wrap="square" anchor="t" lIns="0" rIns="0" tIns="0" bIns="0">
+            <a:spAutoFit/>
+          </a:bodyPr>
+          <a:lstStyle/>
+          <a:p>
+            <a:pPr algn="l">
+              <a:lnSpc>
+                <a:spcPct val="100000"/>
+              </a:lnSpc>
+            </a:pPr>
+            <a:r>
+              <a:rPr sz="1300" b="1" i="0">
+                <a:solidFill>
+                  <a:srgbClr val="B5651D"/>
+                </a:solidFill>
+                <a:latin typeface="Calibri"/>
+              </a:rPr>
+              <a:t>CAVEATS</a:t>
+            </a:r>
+          </a:p>
+        </p:txBody>
+      </p:sp>
+      <p:sp>
+        <p:nvSpPr>
+          <p:cNvPr id="11" name="TextBox 10"/>
+          <p:cNvSpPr txBox="1"/>
+          <p:nvPr/>
+        </p:nvSpPr>
+        <p:spPr>
+          <a:xfrm>
+            <a:off x="502920" y="5212080"/>
+            <a:ext cx="10789920" cy="1005840"/>
+          </a:xfrm>
+          <a:prstGeom prst="rect">
+            <a:avLst/>
+          </a:prstGeom>
+          <a:noFill/>
+        </p:spPr>
+        <p:txBody>
+          <a:bodyPr wrap="square" anchor="t" lIns="0" rIns="0">
+            <a:spAutoFit/>
+          </a:bodyPr>
+          <a:lstStyle/>
+          <a:p>
+            <a:pPr>
+              <a:lnSpc>
+                <a:spcPct val="106000"/>
+              </a:lnSpc>
+              <a:spcAft>
+                <a:spcPts val="700"/>
+              </a:spcAft>
+            </a:pPr>
+            <a:r>
+              <a:rPr sz="1350">
+                <a:solidFill>
+                  <a:srgbClr val="B5651D"/>
+                </a:solidFill>
+                <a:latin typeface="Calibri"/>
+              </a:rPr>
+              <a:t>▪  </a:t>
+            </a:r>
+            <a:r>
+              <a:rPr sz="1350">
+                <a:solidFill>
+                  <a:srgbClr val="1C2119"/>
+                </a:solidFill>
+                <a:latin typeface="Calibri"/>
+              </a:rPr>
+              <a:t>Validation scope is still 3 sites (33 folds) - the natural next step is the full 70-pixel CONUS pool. Fine-tuning shows real run-to-run variance at this sample size; the aggregate statistic, not any single fold, is the evidence that should generalize.</a:t>
+            </a:r>
+          </a:p>
+        </p:txBody>
+      </p:sp>
+      <p:sp>
+        <p:nvSpPr>
+          <p:cNvPr id="12" name="Rectangle 11"/>
+          <p:cNvSpPr/>
+          <p:nvPr/>
+        </p:nvSpPr>
+        <p:spPr>
+          <a:xfrm>
+            <a:off x="0" y="6144768"/>
+            <a:ext cx="12191695" cy="713232"/>
+          </a:xfrm>
+          <a:prstGeom prst="rect">
+            <a:avLst/>
+          </a:prstGeom>
+          <a:solidFill>
+            <a:srgbClr val="E7F0E6"/>
+          </a:solidFill>
+          <a:ln>
+            <a:noFill/>
+          </a:ln>
+          <a:effectLst/>
+        </p:spPr>
+        <p:style>
+          <a:lnRef idx="1">
+            <a:schemeClr val="accent1"/>
+          </a:lnRef>
+          <a:fillRef idx="3">
+            <a:schemeClr val="accent1"/>
+          </a:fillRef>
+          <a:effectRef idx="2">
+            <a:schemeClr val="accent1"/>
+          </a:effectRef>
+          <a:fontRef idx="minor">
+            <a:schemeClr val="lt1"/>
+          </a:fontRef>
+        </p:style>
+        <p:txBody>
+          <a:bodyPr rtlCol="0" anchor="ctr"/>
+          <a:lstStyle/>
+          <a:p>
+            <a:pPr algn="ctr"/>
+          </a:p>
+        </p:txBody>
+      </p:sp>
+      <p:sp>
+        <p:nvSpPr>
+          <p:cNvPr id="13" name="Rectangle 12"/>
+          <p:cNvSpPr/>
+          <p:nvPr/>
+        </p:nvSpPr>
+        <p:spPr>
+          <a:xfrm>
+            <a:off x="0" y="6144768"/>
+            <a:ext cx="109728" cy="713232"/>
+          </a:xfrm>
+          <a:prstGeom prst="rect">
+            <a:avLst/>
+          </a:prstGeom>
+          <a:solidFill>
+            <a:srgbClr val="2F6F5E"/>
+          </a:solidFill>
+          <a:ln>
+            <a:noFill/>
+          </a:ln>
+          <a:effectLst/>
+        </p:spPr>
+        <p:style>
+          <a:lnRef idx="1">
+            <a:schemeClr val="accent1"/>
+          </a:lnRef>
+          <a:fillRef idx="3">
+            <a:schemeClr val="accent1"/>
+          </a:fillRef>
+          <a:effectRef idx="2">
+            <a:schemeClr val="accent1"/>
+          </a:effectRef>
+          <a:fontRef idx="minor">
+            <a:schemeClr val="lt1"/>
+          </a:fontRef>
+        </p:style>
+        <p:txBody>
+          <a:bodyPr rtlCol="0" anchor="ctr"/>
+          <a:lstStyle/>
+          <a:p>
+            <a:pPr algn="ctr"/>
+          </a:p>
+        </p:txBody>
+      </p:sp>
+      <p:sp>
+        <p:nvSpPr>
+          <p:cNvPr id="14" name="TextBox 13"/>
+          <p:cNvSpPr txBox="1"/>
+          <p:nvPr/>
+        </p:nvSpPr>
+        <p:spPr>
+          <a:xfrm>
+            <a:off x="411480" y="6144768"/>
+            <a:ext cx="11368735" cy="713232"/>
+          </a:xfrm>
+          <a:prstGeom prst="rect">
+            <a:avLst/>
+          </a:prstGeom>
+          <a:noFill/>
+        </p:spPr>
+        <p:txBody>
+          <a:bodyPr wrap="square" anchor="ctr" lIns="0" rIns="0" tIns="0" bIns="0">
+            <a:spAutoFit/>
+          </a:bodyPr>
+          <a:lstStyle/>
+          <a:p>
+            <a:pPr algn="l">
+              <a:lnSpc>
+                <a:spcPct val="100000"/>
+              </a:lnSpc>
+            </a:pPr>
+            <a:r>
+              <a:rPr sz="1200" b="1" i="0">
+                <a:solidFill>
+                  <a:srgbClr val="1E4A33"/>
+                </a:solidFill>
+                <a:latin typeface="Calibri"/>
+              </a:rPr>
+              <a:t>TAKEAWAY   </a:t>
+            </a:r>
+          </a:p>
+        </p:txBody>
+      </p:sp>
+      <p:sp>
+        <p:nvSpPr>
+          <p:cNvPr id="15" name="TextBox 14"/>
+          <p:cNvSpPr txBox="1"/>
+          <p:nvPr/>
+        </p:nvSpPr>
+        <p:spPr>
+          <a:xfrm>
+            <a:off x="1417320" y="6144768"/>
+            <a:ext cx="10362895" cy="713232"/>
+          </a:xfrm>
+          <a:prstGeom prst="rect">
+            <a:avLst/>
+          </a:prstGeom>
+          <a:noFill/>
+        </p:spPr>
+        <p:txBody>
+          <a:bodyPr wrap="square" anchor="ctr" lIns="0" rIns="0" tIns="0" bIns="0">
+            <a:spAutoFit/>
+          </a:bodyPr>
+          <a:lstStyle/>
+          <a:p>
+            <a:pPr algn="l">
+              <a:lnSpc>
+                <a:spcPct val="100000"/>
+              </a:lnSpc>
+            </a:pPr>
+            <a:r>
+              <a:rPr sz="1450" b="1" i="0">
+                <a:solidFill>
+                  <a:srgbClr val="1E4A33"/>
+                </a:solidFill>
+                <a:latin typeface="Calibri"/>
+              </a:rPr>
+              <a:t>Both follow-ups answer Prof. Wang's questions directly: variation-forecasting confirms the modest signal is real; the correct equation turns physics guidance into a genuine improvement.</a:t>
             </a:r>
           </a:p>
         </p:txBody>
